--- a/downloads/DCT_V2_Ch10_Slides.pptx
+++ b/downloads/DCT_V2_Ch10_Slides.pptx
@@ -29,9 +29,10 @@
     <p:sldId id="277" r:id="rId23"/>
     <p:sldId id="278" r:id="rId24"/>
     <p:sldId id="279" r:id="rId25"/>
+    <p:sldId id="280" r:id="rId26"/>
   </p:sldIdLst>
   <p:notesMasterIdLst>
-    <p:notesMasterId r:id="rId26"/>
+    <p:notesMasterId r:id="rId27"/>
   </p:notesMasterIdLst>
   <p:sldSz cx="12192000" cy="6858000"/>
   <p:notesSz cx="6858000" cy="12192000"/>
@@ -130,7 +131,7 @@
   <p:extLst>
     <p:ext uri="{521415D9-36F7-43E2-AB2F-B90AF26B5E84}">
       <p14:sectionLst xmlns:p14="http://schemas.microsoft.com/office/powerpoint/2010/main">
-        <p14:section name="Opening" id="{e9ea82c0-ad66-400e-9203-6669c8d3229c}">
+        <p14:section name="Opening" id="{be64ba32-9424-9e9b-5087-36b6dad7a3e0}">
           <p14:sldIdLst>
             <p14:sldId id="256"/>
             <p14:sldId id="257"/>
@@ -138,38 +139,38 @@
             <p14:sldId id="259"/>
           </p14:sldIdLst>
         </p14:section>
-        <p14:section name="10.1 From a Law to a Set" id="{e4636a90-3eef-0216-b4bd-fdbe31cf0ee1}">
+        <p14:section name="10.1 From a Law to a Set" id="{fbc22f95-f46f-805d-1765-fe16bf7d063a}">
           <p14:sldIdLst>
             <p14:sldId id="260"/>
             <p14:sldId id="261"/>
           </p14:sldIdLst>
         </p14:section>
-        <p14:section name="10.2 Robust Counterparts" id="{9ff3799a-bded-d551-fb67-c71e27aa56bd}">
+        <p14:section name="10.2 Robust Counterparts" id="{3925d402-fc64-0a26-3704-3819cd288a53}">
           <p14:sldIdLst>
             <p14:sldId id="262"/>
             <p14:sldId id="263"/>
           </p14:sldIdLst>
         </p14:section>
-        <p14:section name="10.3 Graded Declarations" id="{c7c07dd0-18d5-36bc-e8ae-87584430005c}">
+        <p14:section name="10.3 Graded Declarations" id="{d2032653-21aa-25a0-ab70-73a5047bc96d}">
           <p14:sldIdLst>
             <p14:sldId id="264"/>
             <p14:sldId id="265"/>
           </p14:sldIdLst>
         </p14:section>
-        <p14:section name="10.4 Neuro-Fuzzy Rules" id="{833b8b54-9214-9e3b-7846-f3bcffc99a38}">
+        <p14:section name="10.4 Neuro-Fuzzy Rules" id="{dff0452e-84b6-326f-954a-20ff1238d2b7}">
           <p14:sldIdLst>
             <p14:sldId id="266"/>
             <p14:sldId id="267"/>
             <p14:sldId id="268"/>
           </p14:sldIdLst>
         </p14:section>
-        <p14:section name="10.5 Guarantees, Odds, and Rules" id="{c8666961-6ec3-391e-d495-50855244824f}">
+        <p14:section name="10.5 Guarantees, Odds, and Rules" id="{c85746be-efc2-1141-7042-6a155d46ddf8}">
           <p14:sldIdLst>
             <p14:sldId id="269"/>
             <p14:sldId id="270"/>
           </p14:sldIdLst>
         </p14:section>
-        <p14:section name="Worked Example 10.1" id="{87ee251e-7f79-c0de-4066-2196a40e8495}">
+        <p14:section name="Worked Example 10.1" id="{2cf4246b-db6c-786b-9748-5b74ea3671fb}">
           <p14:sldIdLst>
             <p14:sldId id="271"/>
             <p14:sldId id="272"/>
@@ -178,16 +179,21 @@
             <p14:sldId id="275"/>
           </p14:sldIdLst>
         </p14:section>
-        <p14:section name="AXIOM Lab 2.10" id="{04ca0d74-2891-40d8-493c-500eb7eb8e23}">
+        <p14:section name="In Practice" id="{63a1eea3-cbba-4aae-b858-6356c331f7d6}">
           <p14:sldIdLst>
             <p14:sldId id="276"/>
           </p14:sldIdLst>
         </p14:section>
-        <p14:section name="Close" id="{3f395607-be31-e09e-865b-97de32c11b30}">
+        <p14:section name="AXIOM Lab 2.10" id="{ef2fdd23-f154-c68e-be9f-838471ce9127}">
           <p14:sldIdLst>
             <p14:sldId id="277"/>
+          </p14:sldIdLst>
+        </p14:section>
+        <p14:section name="Close" id="{ad05f70c-7c1a-d9e0-a55f-06203a52a689}">
+          <p14:sldIdLst>
             <p14:sldId id="278"/>
             <p14:sldId id="279"/>
+            <p14:sldId id="280"/>
           </p14:sldIdLst>
         </p14:section>
       </p14:sectionLst>
@@ -1738,7 +1744,7 @@
           <a:p>
             <a:r>
               <a:rPr lang="en-US" dirty="0"/>
-              <a:t>AXIOM Lab 2.10. What to look for: a binding quarter where the plan's margin is smallest; a set's guarantee that fails often under the law when the set leaves out deviations; a graded price and a max-min choice near Chapter 9's cost; rules that rediscover the line's fee and the price of delay, and an error that peaks at the corner.</a:t>
+              <a:t>In Practice, Chapter 10: Ford Maps Its Supply Risk Without Odds. A real organization's decision of this chapter's kind, told from its published record; every figure is cited in the book. The lesson for Meridian: Judge a decision by the worst declared event, and let the guarantee choose which estimates to audit. Sources: Simchi-Levi et al. (2015), Interfaces; Simchi-Levi, Wang and Wei (2018); MIT News (2014).</a:t>
             </a:r>
             <a:endParaRPr lang="en-US" dirty="0"/>
           </a:p>
@@ -1826,7 +1832,7 @@
           <a:p>
             <a:r>
               <a:rPr lang="en-US" dirty="0"/>
-              <a:t>Key Takeaways, Chapter 10.</a:t>
+              <a:t>AXIOM Lab 2.10. What to look for: a binding quarter where the plan's margin is smallest; a set's guarantee that fails often under the law when the set leaves out deviations; a graded price and a max-min choice near Chapter 9's cost; rules that rediscover the line's fee and the price of delay, and an error that peaks at the corner.</a:t>
             </a:r>
             <a:endParaRPr lang="en-US" dirty="0"/>
           </a:p>
@@ -1914,7 +1920,7 @@
           <a:p>
             <a:r>
               <a:rPr lang="en-US" dirty="0"/>
-              <a:t>The notebook and workbook are on the course website, www.dynamiccorporatetransformation.com.</a:t>
+              <a:t>Key Takeaways, Chapter 10.</a:t>
             </a:r>
             <a:endParaRPr lang="en-US" dirty="0"/>
           </a:p>
@@ -2002,7 +2008,7 @@
           <a:p>
             <a:r>
               <a:rPr lang="en-US" dirty="0"/>
-              <a:t>The Scope and Limits box of Section 10.1: Chapter 11 declares a family of laws, which sits between a law and a set. Part III, Enterprise Optimization Under Uncertainty.</a:t>
+              <a:t>The notebook and workbook are on the course website, www.dynamiccorporatetransformation.com.</a:t>
             </a:r>
             <a:endParaRPr lang="en-US" dirty="0"/>
           </a:p>
@@ -2026,6 +2032,94 @@
             <a:fld id="{F7021451-1387-4CA6-816F-3879F97B5CBC}" type="slidenum">
               <a:rPr lang="en-US"/>
               <a:t>24</a:t>
+            </a:fld>
+            <a:endParaRPr lang="en-US"/>
+          </a:p>
+        </p:txBody>
+      </p:sp>
+    </p:spTree>
+    <p:extLst>
+      <p:ext uri="{BB962C8B-B14F-4D97-AF65-F5344CB8AC3E}">
+        <p14:creationId xmlns:p14="http://schemas.microsoft.com/office/powerpoint/2010/main" val="1024086991"/>
+      </p:ext>
+    </p:extLst>
+  </p:cSld>
+  <p:clrMapOvr>
+    <a:masterClrMapping/>
+  </p:clrMapOvr>
+</p:notes>
+</file>
+
+<file path=ppt/notesSlides/notesSlide25.xml><?xml version="1.0" encoding="utf-8"?>
+<p:notes xmlns:a="http://schemas.openxmlformats.org/drawingml/2006/main" xmlns:r="http://schemas.openxmlformats.org/officeDocument/2006/relationships" xmlns:p="http://schemas.openxmlformats.org/presentationml/2006/main">
+  <p:cSld>
+    <p:spTree>
+      <p:nvGrpSpPr>
+        <p:cNvPr id="1" name=""/>
+        <p:cNvGrpSpPr/>
+        <p:nvPr/>
+      </p:nvGrpSpPr>
+      <p:grpSpPr>
+        <a:xfrm>
+          <a:off x="0" y="0"/>
+          <a:ext cx="0" cy="0"/>
+          <a:chOff x="0" y="0"/>
+          <a:chExt cx="0" cy="0"/>
+        </a:xfrm>
+      </p:grpSpPr>
+      <p:sp>
+        <p:nvSpPr>
+          <p:cNvPr id="2" name="Slide Image Placeholder 1"/>
+          <p:cNvSpPr>
+            <a:spLocks noGrp="1" noRot="1" noChangeAspect="1"/>
+          </p:cNvSpPr>
+          <p:nvPr>
+            <p:ph type="sldImg"/>
+          </p:nvPr>
+        </p:nvSpPr>
+        <p:spPr/>
+      </p:sp>
+      <p:sp>
+        <p:nvSpPr>
+          <p:cNvPr id="3" name="Notes Placeholder 2"/>
+          <p:cNvSpPr>
+            <a:spLocks noGrp="1"/>
+          </p:cNvSpPr>
+          <p:nvPr>
+            <p:ph type="body" idx="1"/>
+          </p:nvPr>
+        </p:nvSpPr>
+        <p:spPr/>
+        <p:txBody>
+          <a:bodyPr/>
+          <a:lstStyle/>
+          <a:p>
+            <a:r>
+              <a:rPr lang="en-US" dirty="0"/>
+              <a:t>The Scope and Limits box of Section 10.1: Chapter 11 declares a family of laws, which sits between a law and a set. Part III, Enterprise Optimization Under Uncertainty.</a:t>
+            </a:r>
+            <a:endParaRPr lang="en-US" dirty="0"/>
+          </a:p>
+        </p:txBody>
+      </p:sp>
+      <p:sp>
+        <p:nvSpPr>
+          <p:cNvPr id="4" name="Slide Number Placeholder 3"/>
+          <p:cNvSpPr>
+            <a:spLocks noGrp="1"/>
+          </p:cNvSpPr>
+          <p:nvPr>
+            <p:ph type="sldNum" sz="quarter" idx="10"/>
+          </p:nvPr>
+        </p:nvSpPr>
+        <p:spPr/>
+        <p:txBody>
+          <a:bodyPr/>
+          <a:lstStyle/>
+          <a:p>
+            <a:fld id="{F7021451-1387-4CA6-816F-3879F97B5CBC}" type="slidenum">
+              <a:rPr lang="en-US"/>
+              <a:t>25</a:t>
             </a:fld>
             <a:endParaRPr lang="en-US"/>
           </a:p>
@@ -18684,7 +18778,7 @@
                   <a:schemeClr val="accent1"/>
                 </a:solidFill>
               </a:rPr>
-              <a:t>AXIOM LAB 2.10 · MODULE AXIOM-10</a:t>
+              <a:t>IN PRACTICE · FORD</a:t>
             </a:r>
             <a:endParaRPr lang="en-US" sz="1200" dirty="0"/>
           </a:p>
@@ -18725,804 +18819,26 @@
                 <a:ea typeface="Cambria" pitchFamily="34" charset="-122"/>
                 <a:cs typeface="Cambria" pitchFamily="34" charset="-120"/>
               </a:rPr>
-              <a:t>Guarantees without odds, in AXIOM</a:t>
+              <a:t>Ford maps its supply risk without odds</a:t>
             </a:r>
             <a:endParaRPr lang="en-US" sz="3200" dirty="0"/>
           </a:p>
         </p:txBody>
       </p:sp>
-      <p:pic>
-        <p:nvPicPr>
-          <p:cNvPr id="5" name="AXIOM logo" descr="AXIOM">    </p:cNvPr>
-          <p:cNvPicPr>
-            <a:picLocks noChangeAspect="1"/>
-          </p:cNvPicPr>
-          <p:nvPr/>
-        </p:nvPicPr>
-        <p:blipFill>
-          <a:blip r:embed="rId1"/>
-          <a:stretch>
-            <a:fillRect/>
-          </a:stretch>
-        </p:blipFill>
-        <p:spPr>
-          <a:xfrm>
-            <a:off x="9539935" y="310896"/>
-            <a:ext cx="2103120" cy="420624"/>
-          </a:xfrm>
-          <a:prstGeom prst="rect">
-            <a:avLst/>
-          </a:prstGeom>
-        </p:spPr>
-      </p:pic>
-      <p:sp>
-        <p:nvSpPr>
-          <p:cNvPr id="6" name="Situation"/>
-          <p:cNvSpPr txBox="1"/>
-          <p:nvPr/>
-        </p:nvSpPr>
-        <p:spPr>
-          <a:xfrm>
-            <a:off x="548640" y="1645920"/>
-            <a:ext cx="11094415" cy="777240"/>
-          </a:xfrm>
-          <a:prstGeom prst="rect">
-            <a:avLst/>
-          </a:prstGeom>
-          <a:noFill/>
-          <a:ln/>
-        </p:spPr>
-        <p:txBody>
-          <a:bodyPr wrap="square" lIns="0" tIns="0" rIns="0" bIns="0" rtlCol="0" anchor="t"/>
-          <a:lstStyle/>
-          <a:p>
-            <a:pPr indent="0" marL="0">
-              <a:buNone/>
-            </a:pPr>
-            <a:r>
-              <a:rPr lang="en-US" sz="1500" dirty="0">
-                <a:solidFill>
-                  <a:schemeClr val="tx1"/>
-                </a:solidFill>
-              </a:rPr>
-              <a:t>The audit committee doubts the law behind Chapter 9's package and asks for a guarantee that does not depend on odds. Open AXIOM, choose Lab 2.10 and load the Meridian robust instance: Chapter 9's levers and floor, the offices' bounds and their words.</a:t>
-            </a:r>
-            <a:endParaRPr lang="en-US" sz="1500" dirty="0"/>
-          </a:p>
-        </p:txBody>
-      </p:sp>
-      <p:sp>
-        <p:nvSpPr>
-          <p:cNvPr id="7" name="Flow line"/>
+      <p:sp>
+        <p:nvSpPr>
+          <p:cNvPr id="5" name="Card"/>
           <p:cNvSpPr/>
           <p:nvPr/>
         </p:nvSpPr>
         <p:spPr>
           <a:xfrm>
-            <a:off x="1658082" y="2880360"/>
-            <a:ext cx="8875532" cy="0"/>
-          </a:xfrm>
-          <a:prstGeom prst="line">
-            <a:avLst/>
-          </a:prstGeom>
-          <a:noFill/>
-          <a:ln w="25400">
-            <a:solidFill>
-              <a:srgbClr val="C4CBD8"/>
-            </a:solidFill>
-            <a:prstDash val="solid"/>
-          </a:ln>
-        </p:spPr>
-      </p:sp>
-      <p:sp>
-        <p:nvSpPr>
-          <p:cNvPr id="8" name="Number"/>
-          <p:cNvSpPr/>
-          <p:nvPr/>
-        </p:nvSpPr>
-        <p:spPr>
-          <a:xfrm>
-            <a:off x="1383762" y="2606040"/>
-            <a:ext cx="548640" cy="548640"/>
-          </a:xfrm>
-          <a:prstGeom prst="ellipse">
-            <a:avLst/>
-          </a:prstGeom>
-          <a:solidFill>
-            <a:schemeClr val="accent1"/>
-          </a:solidFill>
-          <a:ln w="6350">
-            <a:solidFill>
-              <a:schemeClr val="accent1"/>
-            </a:solidFill>
-            <a:prstDash val="solid"/>
-          </a:ln>
-        </p:spPr>
-      </p:sp>
-      <p:sp>
-        <p:nvSpPr>
-          <p:cNvPr id="9" name="Text 5"/>
-          <p:cNvSpPr txBox="1"/>
-          <p:nvPr/>
-        </p:nvSpPr>
-        <p:spPr>
-          <a:xfrm>
-            <a:off x="1383762" y="2606040"/>
-            <a:ext cx="548640" cy="548640"/>
-          </a:xfrm>
-          <a:prstGeom prst="rect">
-            <a:avLst/>
-          </a:prstGeom>
-          <a:noFill/>
-          <a:ln/>
-        </p:spPr>
-        <p:txBody>
-          <a:bodyPr wrap="square" lIns="0" tIns="0" rIns="0" bIns="0" rtlCol="0" anchor="ctr"/>
-          <a:lstStyle/>
-          <a:p>
-            <a:pPr algn="ctr" indent="0" marL="0">
-              <a:buNone/>
-            </a:pPr>
-            <a:r>
-              <a:rPr lang="en-US" sz="1600" b="1" dirty="0">
-                <a:solidFill>
-                  <a:schemeClr val="bg1"/>
-                </a:solidFill>
-                <a:latin typeface="Calibri" pitchFamily="34" charset="0"/>
-                <a:ea typeface="Calibri" pitchFamily="34" charset="-122"/>
-                <a:cs typeface="Calibri" pitchFamily="34" charset="-120"/>
-              </a:rPr>
-              <a:t>1</a:t>
-            </a:r>
-            <a:endParaRPr lang="en-US" sz="1600" dirty="0"/>
-          </a:p>
-        </p:txBody>
-      </p:sp>
-      <p:sp>
-        <p:nvSpPr>
-          <p:cNvPr id="10" name="Flow head"/>
-          <p:cNvSpPr txBox="1"/>
-          <p:nvPr/>
-        </p:nvSpPr>
-        <p:spPr>
-          <a:xfrm>
-            <a:off x="621792" y="3291840"/>
-            <a:ext cx="2072579" cy="548640"/>
-          </a:xfrm>
-          <a:prstGeom prst="rect">
-            <a:avLst/>
-          </a:prstGeom>
-          <a:noFill/>
-          <a:ln/>
-        </p:spPr>
-        <p:txBody>
-          <a:bodyPr wrap="square" lIns="0" tIns="0" rIns="0" bIns="0" rtlCol="0" anchor="t"/>
-          <a:lstStyle/>
-          <a:p>
-            <a:pPr algn="ctr" indent="0" marL="0">
-              <a:buNone/>
-            </a:pPr>
-            <a:r>
-              <a:rPr lang="en-US" sz="1600" b="1" dirty="0">
-                <a:solidFill>
-                  <a:schemeClr val="tx1"/>
-                </a:solidFill>
-                <a:latin typeface="Cambria" pitchFamily="34" charset="0"/>
-                <a:ea typeface="Cambria" pitchFamily="34" charset="-122"/>
-                <a:cs typeface="Cambria" pitchFamily="34" charset="-120"/>
-              </a:rPr>
-              <a:t>Declare and solve</a:t>
-            </a:r>
-            <a:endParaRPr lang="en-US" sz="1600" dirty="0"/>
-          </a:p>
-        </p:txBody>
-      </p:sp>
-      <p:sp>
-        <p:nvSpPr>
-          <p:cNvPr id="11" name="Flow text"/>
-          <p:cNvSpPr txBox="1"/>
-          <p:nvPr/>
-        </p:nvSpPr>
-        <p:spPr>
-          <a:xfrm>
-            <a:off x="640080" y="3867912"/>
-            <a:ext cx="2036003" cy="1554480"/>
-          </a:xfrm>
-          <a:prstGeom prst="rect">
-            <a:avLst/>
-          </a:prstGeom>
-          <a:noFill/>
-          <a:ln/>
-        </p:spPr>
-        <p:txBody>
-          <a:bodyPr wrap="square" lIns="0" tIns="0" rIns="0" bIns="0" rtlCol="0" anchor="t"/>
-          <a:lstStyle/>
-          <a:p>
-            <a:pPr algn="ctr" indent="0" marL="0">
-              <a:buNone/>
-            </a:pPr>
-            <a:r>
-              <a:rPr lang="en-US" sz="1400" dirty="0">
-                <a:solidFill>
-                  <a:schemeClr val="tx2"/>
-                </a:solidFill>
-              </a:rPr>
-              <a:t>Bounds on deviations and a closure; the binding quarter and worst case.</a:t>
-            </a:r>
-            <a:endParaRPr lang="en-US" sz="1400" dirty="0"/>
-          </a:p>
-        </p:txBody>
-      </p:sp>
-      <p:sp>
-        <p:nvSpPr>
-          <p:cNvPr id="12" name="Number"/>
-          <p:cNvSpPr/>
-          <p:nvPr/>
-        </p:nvSpPr>
-        <p:spPr>
-          <a:xfrm>
-            <a:off x="3602645" y="2606040"/>
-            <a:ext cx="548640" cy="548640"/>
-          </a:xfrm>
-          <a:prstGeom prst="ellipse">
-            <a:avLst/>
-          </a:prstGeom>
-          <a:solidFill>
-            <a:schemeClr val="accent1"/>
-          </a:solidFill>
-          <a:ln w="6350">
-            <a:solidFill>
-              <a:schemeClr val="accent1"/>
-            </a:solidFill>
-            <a:prstDash val="solid"/>
-          </a:ln>
-        </p:spPr>
-      </p:sp>
-      <p:sp>
-        <p:nvSpPr>
-          <p:cNvPr id="13" name="Text 9"/>
-          <p:cNvSpPr txBox="1"/>
-          <p:nvPr/>
-        </p:nvSpPr>
-        <p:spPr>
-          <a:xfrm>
-            <a:off x="3602645" y="2606040"/>
-            <a:ext cx="548640" cy="548640"/>
-          </a:xfrm>
-          <a:prstGeom prst="rect">
-            <a:avLst/>
-          </a:prstGeom>
-          <a:noFill/>
-          <a:ln/>
-        </p:spPr>
-        <p:txBody>
-          <a:bodyPr wrap="square" lIns="0" tIns="0" rIns="0" bIns="0" rtlCol="0" anchor="ctr"/>
-          <a:lstStyle/>
-          <a:p>
-            <a:pPr algn="ctr" indent="0" marL="0">
-              <a:buNone/>
-            </a:pPr>
-            <a:r>
-              <a:rPr lang="en-US" sz="1600" b="1" dirty="0">
-                <a:solidFill>
-                  <a:schemeClr val="bg1"/>
-                </a:solidFill>
-                <a:latin typeface="Calibri" pitchFamily="34" charset="0"/>
-                <a:ea typeface="Calibri" pitchFamily="34" charset="-122"/>
-                <a:cs typeface="Calibri" pitchFamily="34" charset="-120"/>
-              </a:rPr>
-              <a:t>2</a:t>
-            </a:r>
-            <a:endParaRPr lang="en-US" sz="1600" dirty="0"/>
-          </a:p>
-        </p:txBody>
-      </p:sp>
-      <p:sp>
-        <p:nvSpPr>
-          <p:cNvPr id="14" name="Flow head"/>
-          <p:cNvSpPr txBox="1"/>
-          <p:nvPr/>
-        </p:nvSpPr>
-        <p:spPr>
-          <a:xfrm>
-            <a:off x="2840675" y="3291840"/>
-            <a:ext cx="2072579" cy="548640"/>
-          </a:xfrm>
-          <a:prstGeom prst="rect">
-            <a:avLst/>
-          </a:prstGeom>
-          <a:noFill/>
-          <a:ln/>
-        </p:spPr>
-        <p:txBody>
-          <a:bodyPr wrap="square" lIns="0" tIns="0" rIns="0" bIns="0" rtlCol="0" anchor="t"/>
-          <a:lstStyle/>
-          <a:p>
-            <a:pPr algn="ctr" indent="0" marL="0">
-              <a:buNone/>
-            </a:pPr>
-            <a:r>
-              <a:rPr lang="en-US" sz="1600" b="1" dirty="0">
-                <a:solidFill>
-                  <a:schemeClr val="tx1"/>
-                </a:solidFill>
-                <a:latin typeface="Cambria" pitchFamily="34" charset="0"/>
-                <a:ea typeface="Cambria" pitchFamily="34" charset="-122"/>
-                <a:cs typeface="Cambria" pitchFamily="34" charset="-120"/>
-              </a:rPr>
-              <a:t>Grade</a:t>
-            </a:r>
-            <a:endParaRPr lang="en-US" sz="1600" dirty="0"/>
-          </a:p>
-        </p:txBody>
-      </p:sp>
-      <p:sp>
-        <p:nvSpPr>
-          <p:cNvPr id="15" name="Flow text"/>
-          <p:cNvSpPr txBox="1"/>
-          <p:nvPr/>
-        </p:nvSpPr>
-        <p:spPr>
-          <a:xfrm>
-            <a:off x="2858963" y="3867912"/>
-            <a:ext cx="2036003" cy="1554480"/>
-          </a:xfrm>
-          <a:prstGeom prst="rect">
-            <a:avLst/>
-          </a:prstGeom>
-          <a:noFill/>
-          <a:ln/>
-        </p:spPr>
-        <p:txBody>
-          <a:bodyPr wrap="square" lIns="0" tIns="0" rIns="0" bIns="0" rtlCol="0" anchor="t"/>
-          <a:lstStyle/>
-          <a:p>
-            <a:pPr algn="ctr" indent="0" marL="0">
-              <a:buNone/>
-            </a:pPr>
-            <a:r>
-              <a:rPr lang="en-US" sz="1400" dirty="0">
-                <a:solidFill>
-                  <a:schemeClr val="tx2"/>
-                </a:solidFill>
-              </a:rPr>
-              <a:t>The offices' words as cuts, the cost of each, the max-min choice.</a:t>
-            </a:r>
-            <a:endParaRPr lang="en-US" sz="1400" dirty="0"/>
-          </a:p>
-        </p:txBody>
-      </p:sp>
-      <p:sp>
-        <p:nvSpPr>
-          <p:cNvPr id="16" name="Number"/>
-          <p:cNvSpPr/>
-          <p:nvPr/>
-        </p:nvSpPr>
-        <p:spPr>
-          <a:xfrm>
-            <a:off x="5821528" y="2606040"/>
-            <a:ext cx="548640" cy="548640"/>
-          </a:xfrm>
-          <a:prstGeom prst="ellipse">
-            <a:avLst/>
-          </a:prstGeom>
-          <a:solidFill>
-            <a:schemeClr val="accent1"/>
-          </a:solidFill>
-          <a:ln w="6350">
-            <a:solidFill>
-              <a:schemeClr val="accent1"/>
-            </a:solidFill>
-            <a:prstDash val="solid"/>
-          </a:ln>
-        </p:spPr>
-      </p:sp>
-      <p:sp>
-        <p:nvSpPr>
-          <p:cNvPr id="17" name="Text 13"/>
-          <p:cNvSpPr txBox="1"/>
-          <p:nvPr/>
-        </p:nvSpPr>
-        <p:spPr>
-          <a:xfrm>
-            <a:off x="5821528" y="2606040"/>
-            <a:ext cx="548640" cy="548640"/>
-          </a:xfrm>
-          <a:prstGeom prst="rect">
-            <a:avLst/>
-          </a:prstGeom>
-          <a:noFill/>
-          <a:ln/>
-        </p:spPr>
-        <p:txBody>
-          <a:bodyPr wrap="square" lIns="0" tIns="0" rIns="0" bIns="0" rtlCol="0" anchor="ctr"/>
-          <a:lstStyle/>
-          <a:p>
-            <a:pPr algn="ctr" indent="0" marL="0">
-              <a:buNone/>
-            </a:pPr>
-            <a:r>
-              <a:rPr lang="en-US" sz="1600" b="1" dirty="0">
-                <a:solidFill>
-                  <a:schemeClr val="bg1"/>
-                </a:solidFill>
-                <a:latin typeface="Calibri" pitchFamily="34" charset="0"/>
-                <a:ea typeface="Calibri" pitchFamily="34" charset="-122"/>
-                <a:cs typeface="Calibri" pitchFamily="34" charset="-120"/>
-              </a:rPr>
-              <a:t>3</a:t>
-            </a:r>
-            <a:endParaRPr lang="en-US" sz="1600" dirty="0"/>
-          </a:p>
-        </p:txBody>
-      </p:sp>
-      <p:sp>
-        <p:nvSpPr>
-          <p:cNvPr id="18" name="Flow head"/>
-          <p:cNvSpPr txBox="1"/>
-          <p:nvPr/>
-        </p:nvSpPr>
-        <p:spPr>
-          <a:xfrm>
-            <a:off x="5059558" y="3291840"/>
-            <a:ext cx="2072579" cy="548640"/>
-          </a:xfrm>
-          <a:prstGeom prst="rect">
-            <a:avLst/>
-          </a:prstGeom>
-          <a:noFill/>
-          <a:ln/>
-        </p:spPr>
-        <p:txBody>
-          <a:bodyPr wrap="square" lIns="0" tIns="0" rIns="0" bIns="0" rtlCol="0" anchor="t"/>
-          <a:lstStyle/>
-          <a:p>
-            <a:pPr algn="ctr" indent="0" marL="0">
-              <a:buNone/>
-            </a:pPr>
-            <a:r>
-              <a:rPr lang="en-US" sz="1600" b="1" dirty="0">
-                <a:solidFill>
-                  <a:schemeClr val="tx1"/>
-                </a:solidFill>
-                <a:latin typeface="Cambria" pitchFamily="34" charset="0"/>
-                <a:ea typeface="Cambria" pitchFamily="34" charset="-122"/>
-                <a:cs typeface="Cambria" pitchFamily="34" charset="-120"/>
-              </a:rPr>
-              <a:t>Judge against the law</a:t>
-            </a:r>
-            <a:endParaRPr lang="en-US" sz="1600" dirty="0"/>
-          </a:p>
-        </p:txBody>
-      </p:sp>
-      <p:sp>
-        <p:nvSpPr>
-          <p:cNvPr id="19" name="Flow text"/>
-          <p:cNvSpPr txBox="1"/>
-          <p:nvPr/>
-        </p:nvSpPr>
-        <p:spPr>
-          <a:xfrm>
-            <a:off x="5077846" y="3867912"/>
-            <a:ext cx="2036003" cy="1554480"/>
-          </a:xfrm>
-          <a:prstGeom prst="rect">
-            <a:avLst/>
-          </a:prstGeom>
-          <a:noFill/>
-          <a:ln/>
-        </p:spPr>
-        <p:txBody>
-          <a:bodyPr wrap="square" lIns="0" tIns="0" rIns="0" bIns="0" rtlCol="0" anchor="t"/>
-          <a:lstStyle/>
-          <a:p>
-            <a:pPr algn="ctr" indent="0" marL="0">
-              <a:buNone/>
-            </a:pPr>
-            <a:r>
-              <a:rPr lang="en-US" sz="1400" dirty="0">
-                <a:solidFill>
-                  <a:schemeClr val="tx2"/>
-                </a:solidFill>
-              </a:rPr>
-              <a:t>Chapter 9's paths and fresh ones, beside the frontier.</a:t>
-            </a:r>
-            <a:endParaRPr lang="en-US" sz="1400" dirty="0"/>
-          </a:p>
-        </p:txBody>
-      </p:sp>
-      <p:sp>
-        <p:nvSpPr>
-          <p:cNvPr id="20" name="Number"/>
-          <p:cNvSpPr/>
-          <p:nvPr/>
-        </p:nvSpPr>
-        <p:spPr>
-          <a:xfrm>
-            <a:off x="8040411" y="2606040"/>
-            <a:ext cx="548640" cy="548640"/>
-          </a:xfrm>
-          <a:prstGeom prst="ellipse">
-            <a:avLst/>
-          </a:prstGeom>
-          <a:solidFill>
-            <a:schemeClr val="accent1"/>
-          </a:solidFill>
-          <a:ln w="6350">
-            <a:solidFill>
-              <a:schemeClr val="accent1"/>
-            </a:solidFill>
-            <a:prstDash val="solid"/>
-          </a:ln>
-        </p:spPr>
-      </p:sp>
-      <p:sp>
-        <p:nvSpPr>
-          <p:cNvPr id="21" name="Text 17"/>
-          <p:cNvSpPr txBox="1"/>
-          <p:nvPr/>
-        </p:nvSpPr>
-        <p:spPr>
-          <a:xfrm>
-            <a:off x="8040411" y="2606040"/>
-            <a:ext cx="548640" cy="548640"/>
-          </a:xfrm>
-          <a:prstGeom prst="rect">
-            <a:avLst/>
-          </a:prstGeom>
-          <a:noFill/>
-          <a:ln/>
-        </p:spPr>
-        <p:txBody>
-          <a:bodyPr wrap="square" lIns="0" tIns="0" rIns="0" bIns="0" rtlCol="0" anchor="ctr"/>
-          <a:lstStyle/>
-          <a:p>
-            <a:pPr algn="ctr" indent="0" marL="0">
-              <a:buNone/>
-            </a:pPr>
-            <a:r>
-              <a:rPr lang="en-US" sz="1600" b="1" dirty="0">
-                <a:solidFill>
-                  <a:schemeClr val="bg1"/>
-                </a:solidFill>
-                <a:latin typeface="Calibri" pitchFamily="34" charset="0"/>
-                <a:ea typeface="Calibri" pitchFamily="34" charset="-122"/>
-                <a:cs typeface="Calibri" pitchFamily="34" charset="-120"/>
-              </a:rPr>
-              <a:t>4</a:t>
-            </a:r>
-            <a:endParaRPr lang="en-US" sz="1600" dirty="0"/>
-          </a:p>
-        </p:txBody>
-      </p:sp>
-      <p:sp>
-        <p:nvSpPr>
-          <p:cNvPr id="22" name="Flow head"/>
-          <p:cNvSpPr txBox="1"/>
-          <p:nvPr/>
-        </p:nvSpPr>
-        <p:spPr>
-          <a:xfrm>
-            <a:off x="7278441" y="3291840"/>
-            <a:ext cx="2072579" cy="548640"/>
-          </a:xfrm>
-          <a:prstGeom prst="rect">
-            <a:avLst/>
-          </a:prstGeom>
-          <a:noFill/>
-          <a:ln/>
-        </p:spPr>
-        <p:txBody>
-          <a:bodyPr wrap="square" lIns="0" tIns="0" rIns="0" bIns="0" rtlCol="0" anchor="t"/>
-          <a:lstStyle/>
-          <a:p>
-            <a:pPr algn="ctr" indent="0" marL="0">
-              <a:buNone/>
-            </a:pPr>
-            <a:r>
-              <a:rPr lang="en-US" sz="1600" b="1" dirty="0">
-                <a:solidFill>
-                  <a:schemeClr val="tx1"/>
-                </a:solidFill>
-                <a:latin typeface="Cambria" pitchFamily="34" charset="0"/>
-                <a:ea typeface="Cambria" pitchFamily="34" charset="-122"/>
-                <a:cs typeface="Cambria" pitchFamily="34" charset="-120"/>
-              </a:rPr>
-              <a:t>Learn rules</a:t>
-            </a:r>
-            <a:endParaRPr lang="en-US" sz="1600" dirty="0"/>
-          </a:p>
-        </p:txBody>
-      </p:sp>
-      <p:sp>
-        <p:nvSpPr>
-          <p:cNvPr id="23" name="Flow text"/>
-          <p:cNvSpPr txBox="1"/>
-          <p:nvPr/>
-        </p:nvSpPr>
-        <p:spPr>
-          <a:xfrm>
-            <a:off x="7296729" y="3867912"/>
-            <a:ext cx="2036003" cy="1554480"/>
-          </a:xfrm>
-          <a:prstGeom prst="rect">
-            <a:avLst/>
-          </a:prstGeom>
-          <a:noFill/>
-          <a:ln/>
-        </p:spPr>
-        <p:txBody>
-          <a:bodyPr wrap="square" lIns="0" tIns="0" rIns="0" bIns="0" rtlCol="0" anchor="t"/>
-          <a:lstStyle/>
-          <a:p>
-            <a:pPr algn="ctr" indent="0" marL="0">
-              <a:buNone/>
-            </a:pPr>
-            <a:r>
-              <a:rPr lang="en-US" sz="1400" dirty="0">
-                <a:solidFill>
-                  <a:schemeClr val="tx2"/>
-                </a:solidFill>
-              </a:rPr>
-              <a:t>The price surface rule by rule and overall; read the rules.</a:t>
-            </a:r>
-            <a:endParaRPr lang="en-US" sz="1400" dirty="0"/>
-          </a:p>
-        </p:txBody>
-      </p:sp>
-      <p:sp>
-        <p:nvSpPr>
-          <p:cNvPr id="24" name="Number"/>
-          <p:cNvSpPr/>
-          <p:nvPr/>
-        </p:nvSpPr>
-        <p:spPr>
-          <a:xfrm>
-            <a:off x="10259294" y="2606040"/>
-            <a:ext cx="548640" cy="548640"/>
-          </a:xfrm>
-          <a:prstGeom prst="ellipse">
-            <a:avLst/>
-          </a:prstGeom>
-          <a:solidFill>
-            <a:schemeClr val="accent1"/>
-          </a:solidFill>
-          <a:ln w="6350">
-            <a:solidFill>
-              <a:schemeClr val="accent1"/>
-            </a:solidFill>
-            <a:prstDash val="solid"/>
-          </a:ln>
-        </p:spPr>
-      </p:sp>
-      <p:sp>
-        <p:nvSpPr>
-          <p:cNvPr id="25" name="Text 21"/>
-          <p:cNvSpPr txBox="1"/>
-          <p:nvPr/>
-        </p:nvSpPr>
-        <p:spPr>
-          <a:xfrm>
-            <a:off x="10259294" y="2606040"/>
-            <a:ext cx="548640" cy="548640"/>
-          </a:xfrm>
-          <a:prstGeom prst="rect">
-            <a:avLst/>
-          </a:prstGeom>
-          <a:noFill/>
-          <a:ln/>
-        </p:spPr>
-        <p:txBody>
-          <a:bodyPr wrap="square" lIns="0" tIns="0" rIns="0" bIns="0" rtlCol="0" anchor="ctr"/>
-          <a:lstStyle/>
-          <a:p>
-            <a:pPr algn="ctr" indent="0" marL="0">
-              <a:buNone/>
-            </a:pPr>
-            <a:r>
-              <a:rPr lang="en-US" sz="1600" b="1" dirty="0">
-                <a:solidFill>
-                  <a:schemeClr val="bg1"/>
-                </a:solidFill>
-                <a:latin typeface="Calibri" pitchFamily="34" charset="0"/>
-                <a:ea typeface="Calibri" pitchFamily="34" charset="-122"/>
-                <a:cs typeface="Calibri" pitchFamily="34" charset="-120"/>
-              </a:rPr>
-              <a:t>5</a:t>
-            </a:r>
-            <a:endParaRPr lang="en-US" sz="1600" dirty="0"/>
-          </a:p>
-        </p:txBody>
-      </p:sp>
-      <p:sp>
-        <p:nvSpPr>
-          <p:cNvPr id="26" name="Flow head"/>
-          <p:cNvSpPr txBox="1"/>
-          <p:nvPr/>
-        </p:nvSpPr>
-        <p:spPr>
-          <a:xfrm>
-            <a:off x="9497324" y="3291840"/>
-            <a:ext cx="2072579" cy="548640"/>
-          </a:xfrm>
-          <a:prstGeom prst="rect">
-            <a:avLst/>
-          </a:prstGeom>
-          <a:noFill/>
-          <a:ln/>
-        </p:spPr>
-        <p:txBody>
-          <a:bodyPr wrap="square" lIns="0" tIns="0" rIns="0" bIns="0" rtlCol="0" anchor="t"/>
-          <a:lstStyle/>
-          <a:p>
-            <a:pPr algn="ctr" indent="0" marL="0">
-              <a:buNone/>
-            </a:pPr>
-            <a:r>
-              <a:rPr lang="en-US" sz="1600" b="1" dirty="0">
-                <a:solidFill>
-                  <a:schemeClr val="tx1"/>
-                </a:solidFill>
-                <a:latin typeface="Cambria" pitchFamily="34" charset="0"/>
-                <a:ea typeface="Cambria" pitchFamily="34" charset="-122"/>
-                <a:cs typeface="Cambria" pitchFamily="34" charset="-120"/>
-              </a:rPr>
-              <a:t>Certify</a:t>
-            </a:r>
-            <a:endParaRPr lang="en-US" sz="1600" dirty="0"/>
-          </a:p>
-        </p:txBody>
-      </p:sp>
-      <p:sp>
-        <p:nvSpPr>
-          <p:cNvPr id="27" name="Flow text"/>
-          <p:cNvSpPr txBox="1"/>
-          <p:nvPr/>
-        </p:nvSpPr>
-        <p:spPr>
-          <a:xfrm>
-            <a:off x="9515612" y="3867912"/>
-            <a:ext cx="2036003" cy="1554480"/>
-          </a:xfrm>
-          <a:prstGeom prst="rect">
-            <a:avLst/>
-          </a:prstGeom>
-          <a:noFill/>
-          <a:ln/>
-        </p:spPr>
-        <p:txBody>
-          <a:bodyPr wrap="square" lIns="0" tIns="0" rIns="0" bIns="0" rtlCol="0" anchor="t"/>
-          <a:lstStyle/>
-          <a:p>
-            <a:pPr algn="ctr" indent="0" marL="0">
-              <a:buNone/>
-            </a:pPr>
-            <a:r>
-              <a:rPr lang="en-US" sz="1400" dirty="0">
-                <a:solidFill>
-                  <a:schemeClr val="tx2"/>
-                </a:solidFill>
-              </a:rPr>
-              <a:t>The surface against exact solutions on a grid; one revision exactly.</a:t>
-            </a:r>
-            <a:endParaRPr lang="en-US" sz="1400" dirty="0"/>
-          </a:p>
-        </p:txBody>
-      </p:sp>
-      <p:sp>
-        <p:nvSpPr>
-          <p:cNvPr id="28" name="Deliverable card"/>
-          <p:cNvSpPr/>
-          <p:nvPr/>
-        </p:nvSpPr>
-        <p:spPr>
-          <a:xfrm>
-            <a:off x="548640" y="5486400"/>
-            <a:ext cx="11094415" cy="685800"/>
+            <a:off x="548640" y="1691640"/>
+            <a:ext cx="3515258" cy="2103120"/>
           </a:xfrm>
           <a:prstGeom prst="roundRect">
             <a:avLst>
-              <a:gd name="adj" fmla="val 10667"/>
+              <a:gd name="adj" fmla="val 3478"/>
             </a:avLst>
           </a:prstGeom>
           <a:solidFill>
@@ -19538,14 +18854,14 @@
       </p:sp>
       <p:sp>
         <p:nvSpPr>
-          <p:cNvPr id="29" name="Deliverable"/>
+          <p:cNvPr id="6" name="Card label"/>
           <p:cNvSpPr txBox="1"/>
           <p:nvPr/>
         </p:nvSpPr>
         <p:spPr>
           <a:xfrm>
-            <a:off x="777240" y="5559552"/>
-            <a:ext cx="10637215" cy="539496"/>
+            <a:off x="731520" y="1819656"/>
+            <a:ext cx="3149498" cy="310896"/>
           </a:xfrm>
           <a:prstGeom prst="rect">
             <a:avLst/>
@@ -19561,22 +18877,779 @@
               <a:buNone/>
             </a:pPr>
             <a:r>
-              <a:rPr lang="en-US" sz="1400" b="1" dirty="0">
+              <a:rPr lang="en-US" sz="1300" b="1" dirty="0">
+                <a:solidFill>
+                  <a:schemeClr val="accent1"/>
+                </a:solidFill>
+              </a:rPr>
+              <a:t>The decision</a:t>
+            </a:r>
+            <a:endParaRPr lang="en-US" sz="1300" dirty="0"/>
+          </a:p>
+        </p:txBody>
+      </p:sp>
+      <p:sp>
+        <p:nvSpPr>
+          <p:cNvPr id="7" name="Card head"/>
+          <p:cNvSpPr txBox="1"/>
+          <p:nvPr/>
+        </p:nvSpPr>
+        <p:spPr>
+          <a:xfrm>
+            <a:off x="731520" y="2148840"/>
+            <a:ext cx="3149498" cy="576072"/>
+          </a:xfrm>
+          <a:prstGeom prst="rect">
+            <a:avLst/>
+          </a:prstGeom>
+          <a:noFill/>
+          <a:ln/>
+        </p:spPr>
+        <p:txBody>
+          <a:bodyPr wrap="square" lIns="0" tIns="0" rIns="0" bIns="0" rtlCol="0" anchor="t"/>
+          <a:lstStyle/>
+          <a:p>
+            <a:pPr indent="0" marL="0">
+              <a:buNone/>
+            </a:pPr>
+            <a:r>
+              <a:rPr lang="en-US" sz="1600" b="1" dirty="0">
                 <a:solidFill>
                   <a:schemeClr val="tx1"/>
                 </a:solidFill>
-              </a:rPr>
-              <a:t>Deliverable:</a:t>
-            </a:r>
-            <a:r>
-              <a:rPr lang="en-US" sz="1400" dirty="0">
+                <a:latin typeface="Cambria" pitchFamily="34" charset="0"/>
+                <a:ea typeface="Cambria" pitchFamily="34" charset="-122"/>
+                <a:cs typeface="Cambria" pitchFamily="34" charset="-120"/>
+              </a:rPr>
+              <a:t>Where to spend risk effort</a:t>
+            </a:r>
+            <a:endParaRPr lang="en-US" sz="1600" dirty="0"/>
+          </a:p>
+        </p:txBody>
+      </p:sp>
+      <p:sp>
+        <p:nvSpPr>
+          <p:cNvPr id="8" name="Card text"/>
+          <p:cNvSpPr txBox="1"/>
+          <p:nvPr/>
+        </p:nvSpPr>
+        <p:spPr>
+          <a:xfrm>
+            <a:off x="731520" y="2798064"/>
+            <a:ext cx="3149498" cy="868680"/>
+          </a:xfrm>
+          <a:prstGeom prst="rect">
+            <a:avLst/>
+          </a:prstGeom>
+          <a:noFill/>
+          <a:ln/>
+        </p:spPr>
+        <p:txBody>
+          <a:bodyPr wrap="square" lIns="0" tIns="0" rIns="0" bIns="0" rtlCol="0" anchor="t"/>
+          <a:lstStyle/>
+          <a:p>
+            <a:pPr indent="0" marL="0">
+              <a:buNone/>
+            </a:pPr>
+            <a:r>
+              <a:rPr lang="en-US" sz="1300" dirty="0">
+                <a:solidFill>
+                  <a:schemeClr val="tx2"/>
+                </a:solidFill>
+              </a:rPr>
+              <a:t>Across thousands of supplier sites, without reliable probabilities of rare disruptions.</a:t>
+            </a:r>
+            <a:endParaRPr lang="en-US" sz="1300" dirty="0"/>
+          </a:p>
+        </p:txBody>
+      </p:sp>
+      <p:sp>
+        <p:nvSpPr>
+          <p:cNvPr id="9" name="Card"/>
+          <p:cNvSpPr/>
+          <p:nvPr/>
+        </p:nvSpPr>
+        <p:spPr>
+          <a:xfrm>
+            <a:off x="4338218" y="1691640"/>
+            <a:ext cx="3515258" cy="2103120"/>
+          </a:xfrm>
+          <a:prstGeom prst="roundRect">
+            <a:avLst>
+              <a:gd name="adj" fmla="val 3478"/>
+            </a:avLst>
+          </a:prstGeom>
+          <a:solidFill>
+            <a:schemeClr val="bg2"/>
+          </a:solidFill>
+          <a:ln w="9525">
+            <a:solidFill>
+              <a:srgbClr val="C4CBD8"/>
+            </a:solidFill>
+            <a:prstDash val="solid"/>
+          </a:ln>
+        </p:spPr>
+      </p:sp>
+      <p:sp>
+        <p:nvSpPr>
+          <p:cNvPr id="10" name="Card label"/>
+          <p:cNvSpPr txBox="1"/>
+          <p:nvPr/>
+        </p:nvSpPr>
+        <p:spPr>
+          <a:xfrm>
+            <a:off x="4521098" y="1819656"/>
+            <a:ext cx="3149498" cy="310896"/>
+          </a:xfrm>
+          <a:prstGeom prst="rect">
+            <a:avLst/>
+          </a:prstGeom>
+          <a:noFill/>
+          <a:ln/>
+        </p:spPr>
+        <p:txBody>
+          <a:bodyPr wrap="square" lIns="0" tIns="0" rIns="0" bIns="0" rtlCol="0" anchor="ctr"/>
+          <a:lstStyle/>
+          <a:p>
+            <a:pPr indent="0" marL="0">
+              <a:buNone/>
+            </a:pPr>
+            <a:r>
+              <a:rPr lang="en-US" sz="1300" b="1" dirty="0">
+                <a:solidFill>
+                  <a:schemeClr val="accent1"/>
+                </a:solidFill>
+              </a:rPr>
+              <a:t>The method</a:t>
+            </a:r>
+            <a:endParaRPr lang="en-US" sz="1300" dirty="0"/>
+          </a:p>
+        </p:txBody>
+      </p:sp>
+      <p:sp>
+        <p:nvSpPr>
+          <p:cNvPr id="11" name="Card head"/>
+          <p:cNvSpPr txBox="1"/>
+          <p:nvPr/>
+        </p:nvSpPr>
+        <p:spPr>
+          <a:xfrm>
+            <a:off x="4521098" y="2148840"/>
+            <a:ext cx="3149498" cy="576072"/>
+          </a:xfrm>
+          <a:prstGeom prst="rect">
+            <a:avLst/>
+          </a:prstGeom>
+          <a:noFill/>
+          <a:ln/>
+        </p:spPr>
+        <p:txBody>
+          <a:bodyPr wrap="square" lIns="0" tIns="0" rIns="0" bIns="0" rtlCol="0" anchor="t"/>
+          <a:lstStyle/>
+          <a:p>
+            <a:pPr indent="0" marL="0">
+              <a:buNone/>
+            </a:pPr>
+            <a:r>
+              <a:rPr lang="en-US" sz="1600" b="1" dirty="0">
                 <a:solidFill>
                   <a:schemeClr val="tx1"/>
                 </a:solidFill>
-              </a:rPr>
-              <a:t> a one-page note to the board: the guarantee, its set and price, its chance of a breach if the law is right, the max-min choice, and the declarations it rests on. About 75 minutes.</a:t>
-            </a:r>
-            <a:endParaRPr lang="en-US" sz="1400" dirty="0"/>
+                <a:latin typeface="Cambria" pitchFamily="34" charset="0"/>
+                <a:ea typeface="Cambria" pitchFamily="34" charset="-122"/>
+                <a:cs typeface="Cambria" pitchFamily="34" charset="-120"/>
+              </a:rPr>
+              <a:t>Every node down, one at a time</a:t>
+            </a:r>
+            <a:endParaRPr lang="en-US" sz="1600" dirty="0"/>
+          </a:p>
+        </p:txBody>
+      </p:sp>
+      <p:sp>
+        <p:nvSpPr>
+          <p:cNvPr id="12" name="Card text"/>
+          <p:cNvSpPr txBox="1"/>
+          <p:nvPr/>
+        </p:nvSpPr>
+        <p:spPr>
+          <a:xfrm>
+            <a:off x="4521098" y="2798064"/>
+            <a:ext cx="3149498" cy="868680"/>
+          </a:xfrm>
+          <a:prstGeom prst="rect">
+            <a:avLst/>
+          </a:prstGeom>
+          <a:noFill/>
+          <a:ln/>
+        </p:spPr>
+        <p:txBody>
+          <a:bodyPr wrap="square" lIns="0" tIns="0" rIns="0" bIns="0" rtlCol="0" anchor="t"/>
+          <a:lstStyle/>
+          <a:p>
+            <a:pPr indent="0" marL="0">
+              <a:buNone/>
+            </a:pPr>
+            <a:r>
+              <a:rPr lang="en-US" sz="1300" dirty="0">
+                <a:solidFill>
+                  <a:schemeClr val="tx2"/>
+                </a:solidFill>
+              </a:rPr>
+              <a:t>Each site disrupted for its time to recover; the best response by linear program; time to survive.</a:t>
+            </a:r>
+            <a:endParaRPr lang="en-US" sz="1300" dirty="0"/>
+          </a:p>
+        </p:txBody>
+      </p:sp>
+      <p:sp>
+        <p:nvSpPr>
+          <p:cNvPr id="13" name="Card"/>
+          <p:cNvSpPr/>
+          <p:nvPr/>
+        </p:nvSpPr>
+        <p:spPr>
+          <a:xfrm>
+            <a:off x="8127797" y="1691640"/>
+            <a:ext cx="3515258" cy="2103120"/>
+          </a:xfrm>
+          <a:prstGeom prst="roundRect">
+            <a:avLst>
+              <a:gd name="adj" fmla="val 3478"/>
+            </a:avLst>
+          </a:prstGeom>
+          <a:solidFill>
+            <a:schemeClr val="tx1"/>
+          </a:solidFill>
+          <a:ln w="9525">
+            <a:solidFill>
+              <a:srgbClr val="0F1E3D"/>
+            </a:solidFill>
+            <a:prstDash val="solid"/>
+          </a:ln>
+        </p:spPr>
+      </p:sp>
+      <p:sp>
+        <p:nvSpPr>
+          <p:cNvPr id="14" name="Card label"/>
+          <p:cNvSpPr txBox="1"/>
+          <p:nvPr/>
+        </p:nvSpPr>
+        <p:spPr>
+          <a:xfrm>
+            <a:off x="8310677" y="1819656"/>
+            <a:ext cx="3149498" cy="310896"/>
+          </a:xfrm>
+          <a:prstGeom prst="rect">
+            <a:avLst/>
+          </a:prstGeom>
+          <a:noFill/>
+          <a:ln/>
+        </p:spPr>
+        <p:txBody>
+          <a:bodyPr wrap="square" lIns="0" tIns="0" rIns="0" bIns="0" rtlCol="0" anchor="ctr"/>
+          <a:lstStyle/>
+          <a:p>
+            <a:pPr indent="0" marL="0">
+              <a:buNone/>
+            </a:pPr>
+            <a:r>
+              <a:rPr lang="en-US" sz="1300" b="1" dirty="0">
+                <a:solidFill>
+                  <a:schemeClr val="accent1"/>
+                </a:solidFill>
+              </a:rPr>
+              <a:t>The result</a:t>
+            </a:r>
+            <a:endParaRPr lang="en-US" sz="1300" dirty="0"/>
+          </a:p>
+        </p:txBody>
+      </p:sp>
+      <p:sp>
+        <p:nvSpPr>
+          <p:cNvPr id="15" name="Card head"/>
+          <p:cNvSpPr txBox="1"/>
+          <p:nvPr/>
+        </p:nvSpPr>
+        <p:spPr>
+          <a:xfrm>
+            <a:off x="8310677" y="2148840"/>
+            <a:ext cx="3149498" cy="576072"/>
+          </a:xfrm>
+          <a:prstGeom prst="rect">
+            <a:avLst/>
+          </a:prstGeom>
+          <a:noFill/>
+          <a:ln/>
+        </p:spPr>
+        <p:txBody>
+          <a:bodyPr wrap="square" lIns="0" tIns="0" rIns="0" bIns="0" rtlCol="0" anchor="t"/>
+          <a:lstStyle/>
+          <a:p>
+            <a:pPr indent="0" marL="0">
+              <a:buNone/>
+            </a:pPr>
+            <a:r>
+              <a:rPr lang="en-US" sz="1600" b="1" dirty="0">
+                <a:solidFill>
+                  <a:schemeClr val="bg1"/>
+                </a:solidFill>
+                <a:latin typeface="Cambria" pitchFamily="34" charset="0"/>
+                <a:ea typeface="Cambria" pitchFamily="34" charset="-122"/>
+                <a:cs typeface="Cambria" pitchFamily="34" charset="-120"/>
+              </a:rPr>
+              <a:t>Exposure, not spend</a:t>
+            </a:r>
+            <a:endParaRPr lang="en-US" sz="1600" dirty="0"/>
+          </a:p>
+        </p:txBody>
+      </p:sp>
+      <p:sp>
+        <p:nvSpPr>
+          <p:cNvPr id="16" name="Card text"/>
+          <p:cNvSpPr txBox="1"/>
+          <p:nvPr/>
+        </p:nvSpPr>
+        <p:spPr>
+          <a:xfrm>
+            <a:off x="8310677" y="2798064"/>
+            <a:ext cx="3149498" cy="868680"/>
+          </a:xfrm>
+          <a:prstGeom prst="rect">
+            <a:avLst/>
+          </a:prstGeom>
+          <a:noFill/>
+          <a:ln/>
+        </p:spPr>
+        <p:txBody>
+          <a:bodyPr wrap="square" lIns="0" tIns="0" rIns="0" bIns="0" rtlCol="0" anchor="t"/>
+          <a:lstStyle/>
+          <a:p>
+            <a:pPr indent="0" marL="0">
+              <a:buNone/>
+            </a:pPr>
+            <a:r>
+              <a:rPr lang="en-US" sz="1300" dirty="0">
+                <a:solidFill>
+                  <a:schemeClr val="bg2"/>
+                </a:solidFill>
+              </a:rPr>
+              <a:t>Some of the largest exposures in low-cost parts; about 1,500 more sites slated for more attention.</a:t>
+            </a:r>
+            <a:endParaRPr lang="en-US" sz="1300" dirty="0"/>
+          </a:p>
+        </p:txBody>
+      </p:sp>
+      <p:sp>
+        <p:nvSpPr>
+          <p:cNvPr id="17" name="Card"/>
+          <p:cNvSpPr/>
+          <p:nvPr/>
+        </p:nvSpPr>
+        <p:spPr>
+          <a:xfrm>
+            <a:off x="548640" y="4069080"/>
+            <a:ext cx="3515258" cy="2103120"/>
+          </a:xfrm>
+          <a:prstGeom prst="roundRect">
+            <a:avLst>
+              <a:gd name="adj" fmla="val 3478"/>
+            </a:avLst>
+          </a:prstGeom>
+          <a:solidFill>
+            <a:schemeClr val="bg2"/>
+          </a:solidFill>
+          <a:ln w="9525">
+            <a:solidFill>
+              <a:srgbClr val="C4CBD8"/>
+            </a:solidFill>
+            <a:prstDash val="solid"/>
+          </a:ln>
+        </p:spPr>
+      </p:sp>
+      <p:sp>
+        <p:nvSpPr>
+          <p:cNvPr id="18" name="Card label"/>
+          <p:cNvSpPr txBox="1"/>
+          <p:nvPr/>
+        </p:nvSpPr>
+        <p:spPr>
+          <a:xfrm>
+            <a:off x="731520" y="4197096"/>
+            <a:ext cx="3149498" cy="310896"/>
+          </a:xfrm>
+          <a:prstGeom prst="rect">
+            <a:avLst/>
+          </a:prstGeom>
+          <a:noFill/>
+          <a:ln/>
+        </p:spPr>
+        <p:txBody>
+          <a:bodyPr wrap="square" lIns="0" tIns="0" rIns="0" bIns="0" rtlCol="0" anchor="ctr"/>
+          <a:lstStyle/>
+          <a:p>
+            <a:pPr indent="0" marL="0">
+              <a:buNone/>
+            </a:pPr>
+            <a:r>
+              <a:rPr lang="en-US" sz="1300" b="1" dirty="0">
+                <a:solidFill>
+                  <a:schemeClr val="accent1"/>
+                </a:solidFill>
+              </a:rPr>
+              <a:t>Making it work</a:t>
+            </a:r>
+            <a:endParaRPr lang="en-US" sz="1300" dirty="0"/>
+          </a:p>
+        </p:txBody>
+      </p:sp>
+      <p:sp>
+        <p:nvSpPr>
+          <p:cNvPr id="19" name="Card head"/>
+          <p:cNvSpPr txBox="1"/>
+          <p:nvPr/>
+        </p:nvSpPr>
+        <p:spPr>
+          <a:xfrm>
+            <a:off x="731520" y="4526280"/>
+            <a:ext cx="3149498" cy="576072"/>
+          </a:xfrm>
+          <a:prstGeom prst="rect">
+            <a:avLst/>
+          </a:prstGeom>
+          <a:noFill/>
+          <a:ln/>
+        </p:spPr>
+        <p:txBody>
+          <a:bodyPr wrap="square" lIns="0" tIns="0" rIns="0" bIns="0" rtlCol="0" anchor="t"/>
+          <a:lstStyle/>
+          <a:p>
+            <a:pPr indent="0" marL="0">
+              <a:buNone/>
+            </a:pPr>
+            <a:r>
+              <a:rPr lang="en-US" sz="1600" b="1" dirty="0">
+                <a:solidFill>
+                  <a:schemeClr val="tx1"/>
+                </a:solidFill>
+                <a:latin typeface="Cambria" pitchFamily="34" charset="0"/>
+                <a:ea typeface="Cambria" pitchFamily="34" charset="-122"/>
+                <a:cs typeface="Cambria" pitchFamily="34" charset="-120"/>
+              </a:rPr>
+              <a:t>Data, systems, and use</a:t>
+            </a:r>
+            <a:endParaRPr lang="en-US" sz="1600" dirty="0"/>
+          </a:p>
+        </p:txBody>
+      </p:sp>
+      <p:sp>
+        <p:nvSpPr>
+          <p:cNvPr id="20" name="Card text"/>
+          <p:cNvSpPr txBox="1"/>
+          <p:nvPr/>
+        </p:nvSpPr>
+        <p:spPr>
+          <a:xfrm>
+            <a:off x="731520" y="5175504"/>
+            <a:ext cx="3149498" cy="868680"/>
+          </a:xfrm>
+          <a:prstGeom prst="rect">
+            <a:avLst/>
+          </a:prstGeom>
+          <a:noFill/>
+          <a:ln/>
+        </p:spPr>
+        <p:txBody>
+          <a:bodyPr wrap="square" lIns="0" tIns="0" rIns="0" bIns="0" rtlCol="0" anchor="t"/>
+          <a:lstStyle/>
+          <a:p>
+            <a:pPr indent="0" marL="0">
+              <a:buNone/>
+            </a:pPr>
+            <a:r>
+              <a:rPr lang="en-US" sz="1300" dirty="0">
+                <a:solidFill>
+                  <a:schemeClr val="tx2"/>
+                </a:solidFill>
+              </a:rPr>
+              <a:t>A decision support system on purchasing and planning data, used strategically, daily, and after disruptions.</a:t>
+            </a:r>
+            <a:endParaRPr lang="en-US" sz="1300" dirty="0"/>
+          </a:p>
+        </p:txBody>
+      </p:sp>
+      <p:sp>
+        <p:nvSpPr>
+          <p:cNvPr id="21" name="Card"/>
+          <p:cNvSpPr/>
+          <p:nvPr/>
+        </p:nvSpPr>
+        <p:spPr>
+          <a:xfrm>
+            <a:off x="4338218" y="4069080"/>
+            <a:ext cx="3515258" cy="2103120"/>
+          </a:xfrm>
+          <a:prstGeom prst="roundRect">
+            <a:avLst>
+              <a:gd name="adj" fmla="val 3478"/>
+            </a:avLst>
+          </a:prstGeom>
+          <a:solidFill>
+            <a:schemeClr val="bg2"/>
+          </a:solidFill>
+          <a:ln w="9525">
+            <a:solidFill>
+              <a:srgbClr val="C4CBD8"/>
+            </a:solidFill>
+            <a:prstDash val="solid"/>
+          </a:ln>
+        </p:spPr>
+      </p:sp>
+      <p:sp>
+        <p:nvSpPr>
+          <p:cNvPr id="22" name="Card label"/>
+          <p:cNvSpPr txBox="1"/>
+          <p:nvPr/>
+        </p:nvSpPr>
+        <p:spPr>
+          <a:xfrm>
+            <a:off x="4521098" y="4197096"/>
+            <a:ext cx="3149498" cy="310896"/>
+          </a:xfrm>
+          <a:prstGeom prst="rect">
+            <a:avLst/>
+          </a:prstGeom>
+          <a:noFill/>
+          <a:ln/>
+        </p:spPr>
+        <p:txBody>
+          <a:bodyPr wrap="square" lIns="0" tIns="0" rIns="0" bIns="0" rtlCol="0" anchor="ctr"/>
+          <a:lstStyle/>
+          <a:p>
+            <a:pPr indent="0" marL="0">
+              <a:buNone/>
+            </a:pPr>
+            <a:r>
+              <a:rPr lang="en-US" sz="1300" b="1" dirty="0">
+                <a:solidFill>
+                  <a:schemeClr val="accent1"/>
+                </a:solidFill>
+              </a:rPr>
+              <a:t>What Meridian takes</a:t>
+            </a:r>
+            <a:endParaRPr lang="en-US" sz="1300" dirty="0"/>
+          </a:p>
+        </p:txBody>
+      </p:sp>
+      <p:sp>
+        <p:nvSpPr>
+          <p:cNvPr id="23" name="Card head"/>
+          <p:cNvSpPr txBox="1"/>
+          <p:nvPr/>
+        </p:nvSpPr>
+        <p:spPr>
+          <a:xfrm>
+            <a:off x="4521098" y="4526280"/>
+            <a:ext cx="3149498" cy="576072"/>
+          </a:xfrm>
+          <a:prstGeom prst="rect">
+            <a:avLst/>
+          </a:prstGeom>
+          <a:noFill/>
+          <a:ln/>
+        </p:spPr>
+        <p:txBody>
+          <a:bodyPr wrap="square" lIns="0" tIns="0" rIns="0" bIns="0" rtlCol="0" anchor="t"/>
+          <a:lstStyle/>
+          <a:p>
+            <a:pPr indent="0" marL="0">
+              <a:buNone/>
+            </a:pPr>
+            <a:r>
+              <a:rPr lang="en-US" sz="1600" b="1" dirty="0">
+                <a:solidFill>
+                  <a:schemeClr val="tx1"/>
+                </a:solidFill>
+                <a:latin typeface="Cambria" pitchFamily="34" charset="0"/>
+                <a:ea typeface="Cambria" pitchFamily="34" charset="-122"/>
+                <a:cs typeface="Cambria" pitchFamily="34" charset="-120"/>
+              </a:rPr>
+              <a:t>A guarantee priced by its set</a:t>
+            </a:r>
+            <a:endParaRPr lang="en-US" sz="1600" dirty="0"/>
+          </a:p>
+        </p:txBody>
+      </p:sp>
+      <p:sp>
+        <p:nvSpPr>
+          <p:cNvPr id="24" name="Card text"/>
+          <p:cNvSpPr txBox="1"/>
+          <p:nvPr/>
+        </p:nvSpPr>
+        <p:spPr>
+          <a:xfrm>
+            <a:off x="4521098" y="5175504"/>
+            <a:ext cx="3149498" cy="868680"/>
+          </a:xfrm>
+          <a:prstGeom prst="rect">
+            <a:avLst/>
+          </a:prstGeom>
+          <a:noFill/>
+          <a:ln/>
+        </p:spPr>
+        <p:txBody>
+          <a:bodyPr wrap="square" lIns="0" tIns="0" rIns="0" bIns="0" rtlCol="0" anchor="t"/>
+          <a:lstStyle/>
+          <a:p>
+            <a:pPr indent="0" marL="0">
+              <a:buNone/>
+            </a:pPr>
+            <a:r>
+              <a:rPr lang="en-US" sz="1300" dirty="0">
+                <a:solidFill>
+                  <a:schemeClr val="tx2"/>
+                </a:solidFill>
+              </a:rPr>
+              <a:t>Worked Example 10.1's declared set is the declaration the board should audit first.</a:t>
+            </a:r>
+            <a:endParaRPr lang="en-US" sz="1300" dirty="0"/>
+          </a:p>
+        </p:txBody>
+      </p:sp>
+      <p:sp>
+        <p:nvSpPr>
+          <p:cNvPr id="25" name="Card"/>
+          <p:cNvSpPr/>
+          <p:nvPr/>
+        </p:nvSpPr>
+        <p:spPr>
+          <a:xfrm>
+            <a:off x="8127797" y="4069080"/>
+            <a:ext cx="3515258" cy="2103120"/>
+          </a:xfrm>
+          <a:prstGeom prst="roundRect">
+            <a:avLst>
+              <a:gd name="adj" fmla="val 3478"/>
+            </a:avLst>
+          </a:prstGeom>
+          <a:solidFill>
+            <a:schemeClr val="bg2"/>
+          </a:solidFill>
+          <a:ln w="9525">
+            <a:solidFill>
+              <a:srgbClr val="C4CBD8"/>
+            </a:solidFill>
+            <a:prstDash val="solid"/>
+          </a:ln>
+        </p:spPr>
+      </p:sp>
+      <p:sp>
+        <p:nvSpPr>
+          <p:cNvPr id="26" name="Card label"/>
+          <p:cNvSpPr txBox="1"/>
+          <p:nvPr/>
+        </p:nvSpPr>
+        <p:spPr>
+          <a:xfrm>
+            <a:off x="8310677" y="4197096"/>
+            <a:ext cx="3149498" cy="310896"/>
+          </a:xfrm>
+          <a:prstGeom prst="rect">
+            <a:avLst/>
+          </a:prstGeom>
+          <a:noFill/>
+          <a:ln/>
+        </p:spPr>
+        <p:txBody>
+          <a:bodyPr wrap="square" lIns="0" tIns="0" rIns="0" bIns="0" rtlCol="0" anchor="ctr"/>
+          <a:lstStyle/>
+          <a:p>
+            <a:pPr indent="0" marL="0">
+              <a:buNone/>
+            </a:pPr>
+            <a:r>
+              <a:rPr lang="en-US" sz="1300" b="1" dirty="0">
+                <a:solidFill>
+                  <a:schemeClr val="accent1"/>
+                </a:solidFill>
+              </a:rPr>
+              <a:t>For the board</a:t>
+            </a:r>
+            <a:endParaRPr lang="en-US" sz="1300" dirty="0"/>
+          </a:p>
+        </p:txBody>
+      </p:sp>
+      <p:sp>
+        <p:nvSpPr>
+          <p:cNvPr id="27" name="Card head"/>
+          <p:cNvSpPr txBox="1"/>
+          <p:nvPr/>
+        </p:nvSpPr>
+        <p:spPr>
+          <a:xfrm>
+            <a:off x="8310677" y="4526280"/>
+            <a:ext cx="3149498" cy="576072"/>
+          </a:xfrm>
+          <a:prstGeom prst="rect">
+            <a:avLst/>
+          </a:prstGeom>
+          <a:noFill/>
+          <a:ln/>
+        </p:spPr>
+        <p:txBody>
+          <a:bodyPr wrap="square" lIns="0" tIns="0" rIns="0" bIns="0" rtlCol="0" anchor="t"/>
+          <a:lstStyle/>
+          <a:p>
+            <a:pPr indent="0" marL="0">
+              <a:buNone/>
+            </a:pPr>
+            <a:r>
+              <a:rPr lang="en-US" sz="1600" b="1" dirty="0">
+                <a:solidFill>
+                  <a:schemeClr val="tx1"/>
+                </a:solidFill>
+                <a:latin typeface="Cambria" pitchFamily="34" charset="0"/>
+                <a:ea typeface="Cambria" pitchFamily="34" charset="-122"/>
+                <a:cs typeface="Cambria" pitchFamily="34" charset="-120"/>
+              </a:rPr>
+              <a:t>What would stop us longest?</a:t>
+            </a:r>
+            <a:endParaRPr lang="en-US" sz="1600" dirty="0"/>
+          </a:p>
+        </p:txBody>
+      </p:sp>
+      <p:sp>
+        <p:nvSpPr>
+          <p:cNvPr id="28" name="Card text"/>
+          <p:cNvSpPr txBox="1"/>
+          <p:nvPr/>
+        </p:nvSpPr>
+        <p:spPr>
+          <a:xfrm>
+            <a:off x="8310677" y="5175504"/>
+            <a:ext cx="3149498" cy="868680"/>
+          </a:xfrm>
+          <a:prstGeom prst="rect">
+            <a:avLst/>
+          </a:prstGeom>
+          <a:noFill/>
+          <a:ln/>
+        </p:spPr>
+        <p:txBody>
+          <a:bodyPr wrap="square" lIns="0" tIns="0" rIns="0" bIns="0" rtlCol="0" anchor="t"/>
+          <a:lstStyle/>
+          <a:p>
+            <a:pPr indent="0" marL="0">
+              <a:buNone/>
+            </a:pPr>
+            <a:r>
+              <a:rPr lang="en-US" sz="1300" dirty="0">
+                <a:solidFill>
+                  <a:schemeClr val="tx2"/>
+                </a:solidFill>
+              </a:rPr>
+              <a:t>Is our risk effort allocated by exposure, or by spend?</a:t>
+            </a:r>
+            <a:endParaRPr lang="en-US" sz="1300" dirty="0"/>
           </a:p>
         </p:txBody>
       </p:sp>
@@ -19682,7 +19755,7 @@
                   <a:schemeClr val="accent1"/>
                 </a:solidFill>
               </a:rPr>
-              <a:t>KEY TAKEAWAYS</a:t>
+              <a:t>AXIOM LAB 2.10 · MODULE AXIOM-10</a:t>
             </a:r>
             <a:endParaRPr lang="en-US" sz="1200" dirty="0"/>
           </a:p>
@@ -19723,22 +19796,105 @@
                 <a:ea typeface="Cambria" pitchFamily="34" charset="-122"/>
                 <a:cs typeface="Cambria" pitchFamily="34" charset="-120"/>
               </a:rPr>
-              <a:t>What to carry forward</a:t>
+              <a:t>Guarantees without odds, in AXIOM</a:t>
             </a:r>
             <a:endParaRPr lang="en-US" sz="3200" dirty="0"/>
           </a:p>
         </p:txBody>
       </p:sp>
-      <p:sp>
-        <p:nvSpPr>
-          <p:cNvPr id="5" name="Number"/>
+      <p:pic>
+        <p:nvPicPr>
+          <p:cNvPr id="5" name="AXIOM logo" descr="AXIOM">    </p:cNvPr>
+          <p:cNvPicPr>
+            <a:picLocks noChangeAspect="1"/>
+          </p:cNvPicPr>
+          <p:nvPr/>
+        </p:nvPicPr>
+        <p:blipFill>
+          <a:blip r:embed="rId1"/>
+          <a:stretch>
+            <a:fillRect/>
+          </a:stretch>
+        </p:blipFill>
+        <p:spPr>
+          <a:xfrm>
+            <a:off x="9539935" y="310896"/>
+            <a:ext cx="2103120" cy="420624"/>
+          </a:xfrm>
+          <a:prstGeom prst="rect">
+            <a:avLst/>
+          </a:prstGeom>
+        </p:spPr>
+      </p:pic>
+      <p:sp>
+        <p:nvSpPr>
+          <p:cNvPr id="6" name="Situation"/>
+          <p:cNvSpPr txBox="1"/>
+          <p:nvPr/>
+        </p:nvSpPr>
+        <p:spPr>
+          <a:xfrm>
+            <a:off x="548640" y="1645920"/>
+            <a:ext cx="11094415" cy="777240"/>
+          </a:xfrm>
+          <a:prstGeom prst="rect">
+            <a:avLst/>
+          </a:prstGeom>
+          <a:noFill/>
+          <a:ln/>
+        </p:spPr>
+        <p:txBody>
+          <a:bodyPr wrap="square" lIns="0" tIns="0" rIns="0" bIns="0" rtlCol="0" anchor="t"/>
+          <a:lstStyle/>
+          <a:p>
+            <a:pPr indent="0" marL="0">
+              <a:buNone/>
+            </a:pPr>
+            <a:r>
+              <a:rPr lang="en-US" sz="1500" dirty="0">
+                <a:solidFill>
+                  <a:schemeClr val="tx1"/>
+                </a:solidFill>
+              </a:rPr>
+              <a:t>The audit committee doubts the law behind Chapter 9's package and asks for a guarantee that does not depend on odds. Open AXIOM, choose Lab 2.10 and load the Meridian robust instance: Chapter 9's levers and floor, the offices' bounds and their words.</a:t>
+            </a:r>
+            <a:endParaRPr lang="en-US" sz="1500" dirty="0"/>
+          </a:p>
+        </p:txBody>
+      </p:sp>
+      <p:sp>
+        <p:nvSpPr>
+          <p:cNvPr id="7" name="Flow line"/>
           <p:cNvSpPr/>
           <p:nvPr/>
         </p:nvSpPr>
         <p:spPr>
           <a:xfrm>
-            <a:off x="548640" y="1737360"/>
-            <a:ext cx="566928" cy="566928"/>
+            <a:off x="1658082" y="2880360"/>
+            <a:ext cx="8875532" cy="0"/>
+          </a:xfrm>
+          <a:prstGeom prst="line">
+            <a:avLst/>
+          </a:prstGeom>
+          <a:noFill/>
+          <a:ln w="25400">
+            <a:solidFill>
+              <a:srgbClr val="C4CBD8"/>
+            </a:solidFill>
+            <a:prstDash val="solid"/>
+          </a:ln>
+        </p:spPr>
+      </p:sp>
+      <p:sp>
+        <p:nvSpPr>
+          <p:cNvPr id="8" name="Number"/>
+          <p:cNvSpPr/>
+          <p:nvPr/>
+        </p:nvSpPr>
+        <p:spPr>
+          <a:xfrm>
+            <a:off x="1383762" y="2606040"/>
+            <a:ext cx="548640" cy="548640"/>
           </a:xfrm>
           <a:prstGeom prst="ellipse">
             <a:avLst/>
@@ -19756,14 +19912,14 @@
       </p:sp>
       <p:sp>
         <p:nvSpPr>
-          <p:cNvPr id="6" name="Text 3"/>
+          <p:cNvPr id="9" name="Text 5"/>
           <p:cNvSpPr txBox="1"/>
           <p:nvPr/>
         </p:nvSpPr>
         <p:spPr>
           <a:xfrm>
-            <a:off x="548640" y="1737360"/>
-            <a:ext cx="566928" cy="566928"/>
+            <a:off x="1383762" y="2606040"/>
+            <a:ext cx="548640" cy="548640"/>
           </a:xfrm>
           <a:prstGeom prst="rect">
             <a:avLst/>
@@ -19779,7 +19935,7 @@
               <a:buNone/>
             </a:pPr>
             <a:r>
-              <a:rPr lang="en-US" sz="1500" b="1" dirty="0">
+              <a:rPr lang="en-US" sz="1600" b="1" dirty="0">
                 <a:solidFill>
                   <a:schemeClr val="bg1"/>
                 </a:solidFill>
@@ -19789,20 +19945,20 @@
               </a:rPr>
               <a:t>1</a:t>
             </a:r>
-            <a:endParaRPr lang="en-US" sz="1500" dirty="0"/>
-          </a:p>
-        </p:txBody>
-      </p:sp>
-      <p:sp>
-        <p:nvSpPr>
-          <p:cNvPr id="7" name="Row text"/>
+            <a:endParaRPr lang="en-US" sz="1600" dirty="0"/>
+          </a:p>
+        </p:txBody>
+      </p:sp>
+      <p:sp>
+        <p:nvSpPr>
+          <p:cNvPr id="10" name="Flow head"/>
           <p:cNvSpPr txBox="1"/>
           <p:nvPr/>
         </p:nvSpPr>
         <p:spPr>
           <a:xfrm>
-            <a:off x="1325880" y="1691640"/>
-            <a:ext cx="10317175" cy="841248"/>
+            <a:off x="621792" y="3291840"/>
+            <a:ext cx="2072579" cy="548640"/>
           </a:xfrm>
           <a:prstGeom prst="rect">
             <a:avLst/>
@@ -19811,34 +19967,73 @@
           <a:ln/>
         </p:spPr>
         <p:txBody>
-          <a:bodyPr wrap="square" lIns="0" tIns="0" rIns="0" bIns="0" rtlCol="0" anchor="ctr"/>
+          <a:bodyPr wrap="square" lIns="0" tIns="0" rIns="0" bIns="0" rtlCol="0" anchor="t"/>
           <a:lstStyle/>
           <a:p>
-            <a:pPr indent="0" marL="0">
+            <a:pPr algn="ctr" indent="0" marL="0">
               <a:buNone/>
             </a:pPr>
             <a:r>
-              <a:rPr lang="en-US" sz="1500" dirty="0">
+              <a:rPr lang="en-US" sz="1600" b="1" dirty="0">
                 <a:solidFill>
                   <a:schemeClr val="tx1"/>
                 </a:solidFill>
-              </a:rPr>
-              <a:t>A bounded set of futures is a declaration without odds. A robust decision keeps its commitments on every future in the set, and its guarantee is exactly as good as the set.</a:t>
-            </a:r>
-            <a:endParaRPr lang="en-US" sz="1500" dirty="0"/>
-          </a:p>
-        </p:txBody>
-      </p:sp>
-      <p:sp>
-        <p:nvSpPr>
-          <p:cNvPr id="8" name="Number"/>
+                <a:latin typeface="Cambria" pitchFamily="34" charset="0"/>
+                <a:ea typeface="Cambria" pitchFamily="34" charset="-122"/>
+                <a:cs typeface="Cambria" pitchFamily="34" charset="-120"/>
+              </a:rPr>
+              <a:t>Declare and solve</a:t>
+            </a:r>
+            <a:endParaRPr lang="en-US" sz="1600" dirty="0"/>
+          </a:p>
+        </p:txBody>
+      </p:sp>
+      <p:sp>
+        <p:nvSpPr>
+          <p:cNvPr id="11" name="Flow text"/>
+          <p:cNvSpPr txBox="1"/>
+          <p:nvPr/>
+        </p:nvSpPr>
+        <p:spPr>
+          <a:xfrm>
+            <a:off x="640080" y="3867912"/>
+            <a:ext cx="2036003" cy="1554480"/>
+          </a:xfrm>
+          <a:prstGeom prst="rect">
+            <a:avLst/>
+          </a:prstGeom>
+          <a:noFill/>
+          <a:ln/>
+        </p:spPr>
+        <p:txBody>
+          <a:bodyPr wrap="square" lIns="0" tIns="0" rIns="0" bIns="0" rtlCol="0" anchor="t"/>
+          <a:lstStyle/>
+          <a:p>
+            <a:pPr algn="ctr" indent="0" marL="0">
+              <a:buNone/>
+            </a:pPr>
+            <a:r>
+              <a:rPr lang="en-US" sz="1400" dirty="0">
+                <a:solidFill>
+                  <a:schemeClr val="tx2"/>
+                </a:solidFill>
+              </a:rPr>
+              <a:t>Bounds on deviations and a closure; the binding quarter and worst case.</a:t>
+            </a:r>
+            <a:endParaRPr lang="en-US" sz="1400" dirty="0"/>
+          </a:p>
+        </p:txBody>
+      </p:sp>
+      <p:sp>
+        <p:nvSpPr>
+          <p:cNvPr id="12" name="Number"/>
           <p:cNvSpPr/>
           <p:nvPr/>
         </p:nvSpPr>
         <p:spPr>
           <a:xfrm>
-            <a:off x="548640" y="2633472"/>
-            <a:ext cx="566928" cy="566928"/>
+            <a:off x="3602645" y="2606040"/>
+            <a:ext cx="548640" cy="548640"/>
           </a:xfrm>
           <a:prstGeom prst="ellipse">
             <a:avLst/>
@@ -19856,14 +20051,14 @@
       </p:sp>
       <p:sp>
         <p:nvSpPr>
-          <p:cNvPr id="9" name="Text 6"/>
+          <p:cNvPr id="13" name="Text 9"/>
           <p:cNvSpPr txBox="1"/>
           <p:nvPr/>
         </p:nvSpPr>
         <p:spPr>
           <a:xfrm>
-            <a:off x="548640" y="2633472"/>
-            <a:ext cx="566928" cy="566928"/>
+            <a:off x="3602645" y="2606040"/>
+            <a:ext cx="548640" cy="548640"/>
           </a:xfrm>
           <a:prstGeom prst="rect">
             <a:avLst/>
@@ -19879,7 +20074,7 @@
               <a:buNone/>
             </a:pPr>
             <a:r>
-              <a:rPr lang="en-US" sz="1500" b="1" dirty="0">
+              <a:rPr lang="en-US" sz="1600" b="1" dirty="0">
                 <a:solidFill>
                   <a:schemeClr val="bg1"/>
                 </a:solidFill>
@@ -19889,20 +20084,20 @@
               </a:rPr>
               <a:t>2</a:t>
             </a:r>
-            <a:endParaRPr lang="en-US" sz="1500" dirty="0"/>
-          </a:p>
-        </p:txBody>
-      </p:sp>
-      <p:sp>
-        <p:nvSpPr>
-          <p:cNvPr id="10" name="Row text"/>
+            <a:endParaRPr lang="en-US" sz="1600" dirty="0"/>
+          </a:p>
+        </p:txBody>
+      </p:sp>
+      <p:sp>
+        <p:nvSpPr>
+          <p:cNvPr id="14" name="Flow head"/>
           <p:cNvSpPr txBox="1"/>
           <p:nvPr/>
         </p:nvSpPr>
         <p:spPr>
           <a:xfrm>
-            <a:off x="1325880" y="2587752"/>
-            <a:ext cx="10317175" cy="841248"/>
+            <a:off x="2840675" y="3291840"/>
+            <a:ext cx="2072579" cy="548640"/>
           </a:xfrm>
           <a:prstGeom prst="rect">
             <a:avLst/>
@@ -19911,34 +20106,73 @@
           <a:ln/>
         </p:spPr>
         <p:txBody>
-          <a:bodyPr wrap="square" lIns="0" tIns="0" rIns="0" bIns="0" rtlCol="0" anchor="ctr"/>
+          <a:bodyPr wrap="square" lIns="0" tIns="0" rIns="0" bIns="0" rtlCol="0" anchor="t"/>
           <a:lstStyle/>
           <a:p>
-            <a:pPr indent="0" marL="0">
+            <a:pPr algn="ctr" indent="0" marL="0">
               <a:buNone/>
             </a:pPr>
             <a:r>
-              <a:rPr lang="en-US" sz="1500" dirty="0">
+              <a:rPr lang="en-US" sz="1600" b="1" dirty="0">
                 <a:solidFill>
                   <a:schemeClr val="tx1"/>
                 </a:solidFill>
-              </a:rPr>
-              <a:t>Linear commitments over a box, a budget, or a ball have linear or cone counterparts; the price of robustness rises with the set; a set with probability 1 - α under a law promises the chance 1 - α.</a:t>
-            </a:r>
-            <a:endParaRPr lang="en-US" sz="1500" dirty="0"/>
-          </a:p>
-        </p:txBody>
-      </p:sp>
-      <p:sp>
-        <p:nvSpPr>
-          <p:cNvPr id="11" name="Number"/>
+                <a:latin typeface="Cambria" pitchFamily="34" charset="0"/>
+                <a:ea typeface="Cambria" pitchFamily="34" charset="-122"/>
+                <a:cs typeface="Cambria" pitchFamily="34" charset="-120"/>
+              </a:rPr>
+              <a:t>Grade</a:t>
+            </a:r>
+            <a:endParaRPr lang="en-US" sz="1600" dirty="0"/>
+          </a:p>
+        </p:txBody>
+      </p:sp>
+      <p:sp>
+        <p:nvSpPr>
+          <p:cNvPr id="15" name="Flow text"/>
+          <p:cNvSpPr txBox="1"/>
+          <p:nvPr/>
+        </p:nvSpPr>
+        <p:spPr>
+          <a:xfrm>
+            <a:off x="2858963" y="3867912"/>
+            <a:ext cx="2036003" cy="1554480"/>
+          </a:xfrm>
+          <a:prstGeom prst="rect">
+            <a:avLst/>
+          </a:prstGeom>
+          <a:noFill/>
+          <a:ln/>
+        </p:spPr>
+        <p:txBody>
+          <a:bodyPr wrap="square" lIns="0" tIns="0" rIns="0" bIns="0" rtlCol="0" anchor="t"/>
+          <a:lstStyle/>
+          <a:p>
+            <a:pPr algn="ctr" indent="0" marL="0">
+              <a:buNone/>
+            </a:pPr>
+            <a:r>
+              <a:rPr lang="en-US" sz="1400" dirty="0">
+                <a:solidFill>
+                  <a:schemeClr val="tx2"/>
+                </a:solidFill>
+              </a:rPr>
+              <a:t>The offices' words as cuts, the cost of each, the max-min choice.</a:t>
+            </a:r>
+            <a:endParaRPr lang="en-US" sz="1400" dirty="0"/>
+          </a:p>
+        </p:txBody>
+      </p:sp>
+      <p:sp>
+        <p:nvSpPr>
+          <p:cNvPr id="16" name="Number"/>
           <p:cNvSpPr/>
           <p:nvPr/>
         </p:nvSpPr>
         <p:spPr>
           <a:xfrm>
-            <a:off x="548640" y="3529584"/>
-            <a:ext cx="566928" cy="566928"/>
+            <a:off x="5821528" y="2606040"/>
+            <a:ext cx="548640" cy="548640"/>
           </a:xfrm>
           <a:prstGeom prst="ellipse">
             <a:avLst/>
@@ -19956,14 +20190,14 @@
       </p:sp>
       <p:sp>
         <p:nvSpPr>
-          <p:cNvPr id="12" name="Text 9"/>
+          <p:cNvPr id="17" name="Text 13"/>
           <p:cNvSpPr txBox="1"/>
           <p:nvPr/>
         </p:nvSpPr>
         <p:spPr>
           <a:xfrm>
-            <a:off x="548640" y="3529584"/>
-            <a:ext cx="566928" cy="566928"/>
+            <a:off x="5821528" y="2606040"/>
+            <a:ext cx="548640" cy="548640"/>
           </a:xfrm>
           <a:prstGeom prst="rect">
             <a:avLst/>
@@ -19979,7 +20213,7 @@
               <a:buNone/>
             </a:pPr>
             <a:r>
-              <a:rPr lang="en-US" sz="1500" b="1" dirty="0">
+              <a:rPr lang="en-US" sz="1600" b="1" dirty="0">
                 <a:solidFill>
                   <a:schemeClr val="bg1"/>
                 </a:solidFill>
@@ -19989,20 +20223,20 @@
               </a:rPr>
               <a:t>3</a:t>
             </a:r>
-            <a:endParaRPr lang="en-US" sz="1500" dirty="0"/>
-          </a:p>
-        </p:txBody>
-      </p:sp>
-      <p:sp>
-        <p:nvSpPr>
-          <p:cNvPr id="13" name="Row text"/>
+            <a:endParaRPr lang="en-US" sz="1600" dirty="0"/>
+          </a:p>
+        </p:txBody>
+      </p:sp>
+      <p:sp>
+        <p:nvSpPr>
+          <p:cNvPr id="18" name="Flow head"/>
           <p:cNvSpPr txBox="1"/>
           <p:nvPr/>
         </p:nvSpPr>
         <p:spPr>
           <a:xfrm>
-            <a:off x="1325880" y="3483864"/>
-            <a:ext cx="10317175" cy="841248"/>
+            <a:off x="5059558" y="3291840"/>
+            <a:ext cx="2072579" cy="548640"/>
           </a:xfrm>
           <a:prstGeom prst="rect">
             <a:avLst/>
@@ -20011,34 +20245,73 @@
           <a:ln/>
         </p:spPr>
         <p:txBody>
-          <a:bodyPr wrap="square" lIns="0" tIns="0" rIns="0" bIns="0" rtlCol="0" anchor="ctr"/>
+          <a:bodyPr wrap="square" lIns="0" tIns="0" rIns="0" bIns="0" rtlCol="0" anchor="t"/>
           <a:lstStyle/>
           <a:p>
-            <a:pPr indent="0" marL="0">
+            <a:pPr algn="ctr" indent="0" marL="0">
               <a:buNone/>
             </a:pPr>
             <a:r>
-              <a:rPr lang="en-US" sz="1500" dirty="0">
+              <a:rPr lang="en-US" sz="1600" b="1" dirty="0">
                 <a:solidFill>
                   <a:schemeClr val="tx1"/>
                 </a:solidFill>
-              </a:rPr>
-              <a:t>Graded declarations turn offices' words into nested sets. A decision robust on the α-cut fails only where the offices graded futures below α, and the max-min choice balances a graded goal for cost against the necessity of safety.</a:t>
-            </a:r>
-            <a:endParaRPr lang="en-US" sz="1500" dirty="0"/>
-          </a:p>
-        </p:txBody>
-      </p:sp>
-      <p:sp>
-        <p:nvSpPr>
-          <p:cNvPr id="14" name="Number"/>
+                <a:latin typeface="Cambria" pitchFamily="34" charset="0"/>
+                <a:ea typeface="Cambria" pitchFamily="34" charset="-122"/>
+                <a:cs typeface="Cambria" pitchFamily="34" charset="-120"/>
+              </a:rPr>
+              <a:t>Judge against the law</a:t>
+            </a:r>
+            <a:endParaRPr lang="en-US" sz="1600" dirty="0"/>
+          </a:p>
+        </p:txBody>
+      </p:sp>
+      <p:sp>
+        <p:nvSpPr>
+          <p:cNvPr id="19" name="Flow text"/>
+          <p:cNvSpPr txBox="1"/>
+          <p:nvPr/>
+        </p:nvSpPr>
+        <p:spPr>
+          <a:xfrm>
+            <a:off x="5077846" y="3867912"/>
+            <a:ext cx="2036003" cy="1554480"/>
+          </a:xfrm>
+          <a:prstGeom prst="rect">
+            <a:avLst/>
+          </a:prstGeom>
+          <a:noFill/>
+          <a:ln/>
+        </p:spPr>
+        <p:txBody>
+          <a:bodyPr wrap="square" lIns="0" tIns="0" rIns="0" bIns="0" rtlCol="0" anchor="t"/>
+          <a:lstStyle/>
+          <a:p>
+            <a:pPr algn="ctr" indent="0" marL="0">
+              <a:buNone/>
+            </a:pPr>
+            <a:r>
+              <a:rPr lang="en-US" sz="1400" dirty="0">
+                <a:solidFill>
+                  <a:schemeClr val="tx2"/>
+                </a:solidFill>
+              </a:rPr>
+              <a:t>Chapter 9's paths and fresh ones, beside the frontier.</a:t>
+            </a:r>
+            <a:endParaRPr lang="en-US" sz="1400" dirty="0"/>
+          </a:p>
+        </p:txBody>
+      </p:sp>
+      <p:sp>
+        <p:nvSpPr>
+          <p:cNvPr id="20" name="Number"/>
           <p:cNvSpPr/>
           <p:nvPr/>
         </p:nvSpPr>
         <p:spPr>
           <a:xfrm>
-            <a:off x="548640" y="4425696"/>
-            <a:ext cx="566928" cy="566928"/>
+            <a:off x="8040411" y="2606040"/>
+            <a:ext cx="548640" cy="548640"/>
           </a:xfrm>
           <a:prstGeom prst="ellipse">
             <a:avLst/>
@@ -20056,14 +20329,14 @@
       </p:sp>
       <p:sp>
         <p:nvSpPr>
-          <p:cNvPr id="15" name="Text 12"/>
+          <p:cNvPr id="21" name="Text 17"/>
           <p:cNvSpPr txBox="1"/>
           <p:nvPr/>
         </p:nvSpPr>
         <p:spPr>
           <a:xfrm>
-            <a:off x="548640" y="4425696"/>
-            <a:ext cx="566928" cy="566928"/>
+            <a:off x="8040411" y="2606040"/>
+            <a:ext cx="548640" cy="548640"/>
           </a:xfrm>
           <a:prstGeom prst="rect">
             <a:avLst/>
@@ -20079,7 +20352,7 @@
               <a:buNone/>
             </a:pPr>
             <a:r>
-              <a:rPr lang="en-US" sz="1500" b="1" dirty="0">
+              <a:rPr lang="en-US" sz="1600" b="1" dirty="0">
                 <a:solidFill>
                   <a:schemeClr val="bg1"/>
                 </a:solidFill>
@@ -20089,20 +20362,20 @@
               </a:rPr>
               <a:t>4</a:t>
             </a:r>
-            <a:endParaRPr lang="en-US" sz="1500" dirty="0"/>
-          </a:p>
-        </p:txBody>
-      </p:sp>
-      <p:sp>
-        <p:nvSpPr>
-          <p:cNvPr id="16" name="Row text"/>
+            <a:endParaRPr lang="en-US" sz="1600" dirty="0"/>
+          </a:p>
+        </p:txBody>
+      </p:sp>
+      <p:sp>
+        <p:nvSpPr>
+          <p:cNvPr id="22" name="Flow head"/>
           <p:cNvSpPr txBox="1"/>
           <p:nvPr/>
         </p:nvSpPr>
         <p:spPr>
           <a:xfrm>
-            <a:off x="1325880" y="4379976"/>
-            <a:ext cx="10317175" cy="841248"/>
+            <a:off x="7278441" y="3291840"/>
+            <a:ext cx="2072579" cy="548640"/>
           </a:xfrm>
           <a:prstGeom prst="rect">
             <a:avLst/>
@@ -20111,34 +20384,73 @@
           <a:ln/>
         </p:spPr>
         <p:txBody>
-          <a:bodyPr wrap="square" lIns="0" tIns="0" rIns="0" bIns="0" rtlCol="0" anchor="ctr"/>
+          <a:bodyPr wrap="square" lIns="0" tIns="0" rIns="0" bIns="0" rtlCol="0" anchor="t"/>
           <a:lstStyle/>
           <a:p>
-            <a:pPr indent="0" marL="0">
+            <a:pPr algn="ctr" indent="0" marL="0">
               <a:buNone/>
             </a:pPr>
             <a:r>
-              <a:rPr lang="en-US" sz="1500" dirty="0">
+              <a:rPr lang="en-US" sz="1600" b="1" dirty="0">
                 <a:solidFill>
                   <a:schemeClr val="tx1"/>
                 </a:solidFill>
-              </a:rPr>
-              <a:t>Neuro-fuzzy rules write decision surfaces in the declarations' language and learn them by least squares and gradient steps; trained rule by rule they stay readable. Their proposals are adopted only after the exact check.</a:t>
-            </a:r>
-            <a:endParaRPr lang="en-US" sz="1500" dirty="0"/>
-          </a:p>
-        </p:txBody>
-      </p:sp>
-      <p:sp>
-        <p:nvSpPr>
-          <p:cNvPr id="17" name="Number"/>
+                <a:latin typeface="Cambria" pitchFamily="34" charset="0"/>
+                <a:ea typeface="Cambria" pitchFamily="34" charset="-122"/>
+                <a:cs typeface="Cambria" pitchFamily="34" charset="-120"/>
+              </a:rPr>
+              <a:t>Learn rules</a:t>
+            </a:r>
+            <a:endParaRPr lang="en-US" sz="1600" dirty="0"/>
+          </a:p>
+        </p:txBody>
+      </p:sp>
+      <p:sp>
+        <p:nvSpPr>
+          <p:cNvPr id="23" name="Flow text"/>
+          <p:cNvSpPr txBox="1"/>
+          <p:nvPr/>
+        </p:nvSpPr>
+        <p:spPr>
+          <a:xfrm>
+            <a:off x="7296729" y="3867912"/>
+            <a:ext cx="2036003" cy="1554480"/>
+          </a:xfrm>
+          <a:prstGeom prst="rect">
+            <a:avLst/>
+          </a:prstGeom>
+          <a:noFill/>
+          <a:ln/>
+        </p:spPr>
+        <p:txBody>
+          <a:bodyPr wrap="square" lIns="0" tIns="0" rIns="0" bIns="0" rtlCol="0" anchor="t"/>
+          <a:lstStyle/>
+          <a:p>
+            <a:pPr algn="ctr" indent="0" marL="0">
+              <a:buNone/>
+            </a:pPr>
+            <a:r>
+              <a:rPr lang="en-US" sz="1400" dirty="0">
+                <a:solidFill>
+                  <a:schemeClr val="tx2"/>
+                </a:solidFill>
+              </a:rPr>
+              <a:t>The price surface rule by rule and overall; read the rules.</a:t>
+            </a:r>
+            <a:endParaRPr lang="en-US" sz="1400" dirty="0"/>
+          </a:p>
+        </p:txBody>
+      </p:sp>
+      <p:sp>
+        <p:nvSpPr>
+          <p:cNvPr id="24" name="Number"/>
           <p:cNvSpPr/>
           <p:nvPr/>
         </p:nvSpPr>
         <p:spPr>
           <a:xfrm>
-            <a:off x="548640" y="5321808"/>
-            <a:ext cx="566928" cy="566928"/>
+            <a:off x="10259294" y="2606040"/>
+            <a:ext cx="548640" cy="548640"/>
           </a:xfrm>
           <a:prstGeom prst="ellipse">
             <a:avLst/>
@@ -20156,14 +20468,14 @@
       </p:sp>
       <p:sp>
         <p:nvSpPr>
-          <p:cNvPr id="18" name="Text 15"/>
+          <p:cNvPr id="25" name="Text 21"/>
           <p:cNvSpPr txBox="1"/>
           <p:nvPr/>
         </p:nvSpPr>
         <p:spPr>
           <a:xfrm>
-            <a:off x="548640" y="5321808"/>
-            <a:ext cx="566928" cy="566928"/>
+            <a:off x="10259294" y="2606040"/>
+            <a:ext cx="548640" cy="548640"/>
           </a:xfrm>
           <a:prstGeom prst="rect">
             <a:avLst/>
@@ -20179,7 +20491,7 @@
               <a:buNone/>
             </a:pPr>
             <a:r>
-              <a:rPr lang="en-US" sz="1500" b="1" dirty="0">
+              <a:rPr lang="en-US" sz="1600" b="1" dirty="0">
                 <a:solidFill>
                   <a:schemeClr val="bg1"/>
                 </a:solidFill>
@@ -20189,20 +20501,122 @@
               </a:rPr>
               <a:t>5</a:t>
             </a:r>
-            <a:endParaRPr lang="en-US" sz="1500" dirty="0"/>
-          </a:p>
-        </p:txBody>
-      </p:sp>
-      <p:sp>
-        <p:nvSpPr>
-          <p:cNvPr id="19" name="Row text"/>
+            <a:endParaRPr lang="en-US" sz="1600" dirty="0"/>
+          </a:p>
+        </p:txBody>
+      </p:sp>
+      <p:sp>
+        <p:nvSpPr>
+          <p:cNvPr id="26" name="Flow head"/>
           <p:cNvSpPr txBox="1"/>
           <p:nvPr/>
         </p:nvSpPr>
         <p:spPr>
           <a:xfrm>
-            <a:off x="1325880" y="5276088"/>
-            <a:ext cx="10317175" cy="841248"/>
+            <a:off x="9497324" y="3291840"/>
+            <a:ext cx="2072579" cy="548640"/>
+          </a:xfrm>
+          <a:prstGeom prst="rect">
+            <a:avLst/>
+          </a:prstGeom>
+          <a:noFill/>
+          <a:ln/>
+        </p:spPr>
+        <p:txBody>
+          <a:bodyPr wrap="square" lIns="0" tIns="0" rIns="0" bIns="0" rtlCol="0" anchor="t"/>
+          <a:lstStyle/>
+          <a:p>
+            <a:pPr algn="ctr" indent="0" marL="0">
+              <a:buNone/>
+            </a:pPr>
+            <a:r>
+              <a:rPr lang="en-US" sz="1600" b="1" dirty="0">
+                <a:solidFill>
+                  <a:schemeClr val="tx1"/>
+                </a:solidFill>
+                <a:latin typeface="Cambria" pitchFamily="34" charset="0"/>
+                <a:ea typeface="Cambria" pitchFamily="34" charset="-122"/>
+                <a:cs typeface="Cambria" pitchFamily="34" charset="-120"/>
+              </a:rPr>
+              <a:t>Certify</a:t>
+            </a:r>
+            <a:endParaRPr lang="en-US" sz="1600" dirty="0"/>
+          </a:p>
+        </p:txBody>
+      </p:sp>
+      <p:sp>
+        <p:nvSpPr>
+          <p:cNvPr id="27" name="Flow text"/>
+          <p:cNvSpPr txBox="1"/>
+          <p:nvPr/>
+        </p:nvSpPr>
+        <p:spPr>
+          <a:xfrm>
+            <a:off x="9515612" y="3867912"/>
+            <a:ext cx="2036003" cy="1554480"/>
+          </a:xfrm>
+          <a:prstGeom prst="rect">
+            <a:avLst/>
+          </a:prstGeom>
+          <a:noFill/>
+          <a:ln/>
+        </p:spPr>
+        <p:txBody>
+          <a:bodyPr wrap="square" lIns="0" tIns="0" rIns="0" bIns="0" rtlCol="0" anchor="t"/>
+          <a:lstStyle/>
+          <a:p>
+            <a:pPr algn="ctr" indent="0" marL="0">
+              <a:buNone/>
+            </a:pPr>
+            <a:r>
+              <a:rPr lang="en-US" sz="1400" dirty="0">
+                <a:solidFill>
+                  <a:schemeClr val="tx2"/>
+                </a:solidFill>
+              </a:rPr>
+              <a:t>The surface against exact solutions on a grid; one revision exactly.</a:t>
+            </a:r>
+            <a:endParaRPr lang="en-US" sz="1400" dirty="0"/>
+          </a:p>
+        </p:txBody>
+      </p:sp>
+      <p:sp>
+        <p:nvSpPr>
+          <p:cNvPr id="28" name="Deliverable card"/>
+          <p:cNvSpPr/>
+          <p:nvPr/>
+        </p:nvSpPr>
+        <p:spPr>
+          <a:xfrm>
+            <a:off x="548640" y="5486400"/>
+            <a:ext cx="11094415" cy="685800"/>
+          </a:xfrm>
+          <a:prstGeom prst="roundRect">
+            <a:avLst>
+              <a:gd name="adj" fmla="val 10667"/>
+            </a:avLst>
+          </a:prstGeom>
+          <a:solidFill>
+            <a:schemeClr val="bg2"/>
+          </a:solidFill>
+          <a:ln w="9525">
+            <a:solidFill>
+              <a:srgbClr val="C4CBD8"/>
+            </a:solidFill>
+            <a:prstDash val="solid"/>
+          </a:ln>
+        </p:spPr>
+      </p:sp>
+      <p:sp>
+        <p:nvSpPr>
+          <p:cNvPr id="29" name="Deliverable"/>
+          <p:cNvSpPr txBox="1"/>
+          <p:nvPr/>
+        </p:nvSpPr>
+        <p:spPr>
+          <a:xfrm>
+            <a:off x="777240" y="5559552"/>
+            <a:ext cx="10637215" cy="539496"/>
           </a:xfrm>
           <a:prstGeom prst="rect">
             <a:avLst/>
@@ -20218,14 +20632,22 @@
               <a:buNone/>
             </a:pPr>
             <a:r>
-              <a:rPr lang="en-US" sz="1500" dirty="0">
+              <a:rPr lang="en-US" sz="1400" b="1" dirty="0">
                 <a:solidFill>
                   <a:schemeClr val="tx1"/>
                 </a:solidFill>
               </a:rPr>
-              <a:t>Robust packages, judged by a law, cost a little more than the cheapest package for the same chance, but do not need the law. Under a set, a rule helps only if its reading comes before the damage.</a:t>
-            </a:r>
-            <a:endParaRPr lang="en-US" sz="1500" dirty="0"/>
+              <a:t>Deliverable:</a:t>
+            </a:r>
+            <a:r>
+              <a:rPr lang="en-US" sz="1400" dirty="0">
+                <a:solidFill>
+                  <a:schemeClr val="tx1"/>
+                </a:solidFill>
+              </a:rPr>
+              <a:t> a one-page note to the board: the guarantee, its set and price, its chance of a breach if the law is right, the max-min choice, and the declarations it rests on. About 75 minutes.</a:t>
+            </a:r>
+            <a:endParaRPr lang="en-US" sz="1400" dirty="0"/>
           </a:p>
         </p:txBody>
       </p:sp>
@@ -20331,7 +20753,7 @@
                   <a:schemeClr val="accent1"/>
                 </a:solidFill>
               </a:rPr>
-              <a:t>THIS WEEK'S LABORATORY</a:t>
+              <a:t>KEY TAKEAWAYS</a:t>
             </a:r>
             <a:endParaRPr lang="en-US" sz="1200" dirty="0"/>
           </a:p>
@@ -20372,7 +20794,7 @@
                 <a:ea typeface="Cambria" pitchFamily="34" charset="-122"/>
                 <a:cs typeface="Cambria" pitchFamily="34" charset="-120"/>
               </a:rPr>
-              <a:t>Notebook and workbook reproduce the book</a:t>
+              <a:t>What to carry forward</a:t>
             </a:r>
             <a:endParaRPr lang="en-US" sz="3200" dirty="0"/>
           </a:p>
@@ -20380,26 +20802,24 @@
       </p:sp>
       <p:sp>
         <p:nvSpPr>
-          <p:cNvPr id="5" name="Stat card"/>
+          <p:cNvPr id="5" name="Number"/>
           <p:cNvSpPr/>
           <p:nvPr/>
         </p:nvSpPr>
         <p:spPr>
           <a:xfrm>
-            <a:off x="548640" y="1691640"/>
-            <a:ext cx="2567864" cy="1691640"/>
-          </a:xfrm>
-          <a:prstGeom prst="roundRect">
-            <a:avLst>
-              <a:gd name="adj" fmla="val 4324"/>
-            </a:avLst>
+            <a:off x="548640" y="1737360"/>
+            <a:ext cx="566928" cy="566928"/>
+          </a:xfrm>
+          <a:prstGeom prst="ellipse">
+            <a:avLst/>
           </a:prstGeom>
           <a:solidFill>
-            <a:schemeClr val="tx1"/>
+            <a:schemeClr val="accent1"/>
           </a:solidFill>
-          <a:ln w="9525">
+          <a:ln w="6350">
             <a:solidFill>
-              <a:srgbClr val="0F1E3D"/>
+              <a:schemeClr val="accent1"/>
             </a:solidFill>
             <a:prstDash val="solid"/>
           </a:ln>
@@ -20407,14 +20827,14 @@
       </p:sp>
       <p:sp>
         <p:nvSpPr>
-          <p:cNvPr id="6" name="Stat value"/>
+          <p:cNvPr id="6" name="Text 3"/>
           <p:cNvSpPr txBox="1"/>
           <p:nvPr/>
         </p:nvSpPr>
         <p:spPr>
           <a:xfrm>
-            <a:off x="685800" y="1801368"/>
-            <a:ext cx="2293544" cy="914400"/>
+            <a:off x="548640" y="1737360"/>
+            <a:ext cx="566928" cy="566928"/>
           </a:xfrm>
           <a:prstGeom prst="rect">
             <a:avLst/>
@@ -20430,30 +20850,30 @@
               <a:buNone/>
             </a:pPr>
             <a:r>
-              <a:rPr lang="en-US" sz="4400" b="1" dirty="0">
-                <a:solidFill>
-                  <a:schemeClr val="accent1"/>
-                </a:solidFill>
-                <a:latin typeface="Cambria" pitchFamily="34" charset="0"/>
-                <a:ea typeface="Cambria" pitchFamily="34" charset="-122"/>
-                <a:cs typeface="Cambria" pitchFamily="34" charset="-120"/>
-              </a:rPr>
-              <a:t>247</a:t>
-            </a:r>
-            <a:endParaRPr lang="en-US" sz="4400" dirty="0"/>
-          </a:p>
-        </p:txBody>
-      </p:sp>
-      <p:sp>
-        <p:nvSpPr>
-          <p:cNvPr id="7" name="Stat label"/>
+              <a:rPr lang="en-US" sz="1500" b="1" dirty="0">
+                <a:solidFill>
+                  <a:schemeClr val="bg1"/>
+                </a:solidFill>
+                <a:latin typeface="Calibri" pitchFamily="34" charset="0"/>
+                <a:ea typeface="Calibri" pitchFamily="34" charset="-122"/>
+                <a:cs typeface="Calibri" pitchFamily="34" charset="-120"/>
+              </a:rPr>
+              <a:t>1</a:t>
+            </a:r>
+            <a:endParaRPr lang="en-US" sz="1500" dirty="0"/>
+          </a:p>
+        </p:txBody>
+      </p:sp>
+      <p:sp>
+        <p:nvSpPr>
+          <p:cNvPr id="7" name="Row text"/>
           <p:cNvSpPr txBox="1"/>
           <p:nvPr/>
         </p:nvSpPr>
         <p:spPr>
           <a:xfrm>
-            <a:off x="685800" y="2697480"/>
-            <a:ext cx="2293544" cy="612648"/>
+            <a:off x="1325880" y="1691640"/>
+            <a:ext cx="10317175" cy="841248"/>
           </a:xfrm>
           <a:prstGeom prst="rect">
             <a:avLst/>
@@ -20462,46 +20882,144 @@
           <a:ln/>
         </p:spPr>
         <p:txBody>
-          <a:bodyPr wrap="square" lIns="0" tIns="0" rIns="0" bIns="0" rtlCol="0" anchor="t"/>
+          <a:bodyPr wrap="square" lIns="0" tIns="0" rIns="0" bIns="0" rtlCol="0" anchor="ctr"/>
+          <a:lstStyle/>
+          <a:p>
+            <a:pPr indent="0" marL="0">
+              <a:buNone/>
+            </a:pPr>
+            <a:r>
+              <a:rPr lang="en-US" sz="1500" dirty="0">
+                <a:solidFill>
+                  <a:schemeClr val="tx1"/>
+                </a:solidFill>
+              </a:rPr>
+              <a:t>A bounded set of futures is a declaration without odds. A robust decision keeps its commitments on every future in the set, and its guarantee is exactly as good as the set.</a:t>
+            </a:r>
+            <a:endParaRPr lang="en-US" sz="1500" dirty="0"/>
+          </a:p>
+        </p:txBody>
+      </p:sp>
+      <p:sp>
+        <p:nvSpPr>
+          <p:cNvPr id="8" name="Number"/>
+          <p:cNvSpPr/>
+          <p:nvPr/>
+        </p:nvSpPr>
+        <p:spPr>
+          <a:xfrm>
+            <a:off x="548640" y="2633472"/>
+            <a:ext cx="566928" cy="566928"/>
+          </a:xfrm>
+          <a:prstGeom prst="ellipse">
+            <a:avLst/>
+          </a:prstGeom>
+          <a:solidFill>
+            <a:schemeClr val="accent1"/>
+          </a:solidFill>
+          <a:ln w="6350">
+            <a:solidFill>
+              <a:schemeClr val="accent1"/>
+            </a:solidFill>
+            <a:prstDash val="solid"/>
+          </a:ln>
+        </p:spPr>
+      </p:sp>
+      <p:sp>
+        <p:nvSpPr>
+          <p:cNvPr id="9" name="Text 6"/>
+          <p:cNvSpPr txBox="1"/>
+          <p:nvPr/>
+        </p:nvSpPr>
+        <p:spPr>
+          <a:xfrm>
+            <a:off x="548640" y="2633472"/>
+            <a:ext cx="566928" cy="566928"/>
+          </a:xfrm>
+          <a:prstGeom prst="rect">
+            <a:avLst/>
+          </a:prstGeom>
+          <a:noFill/>
+          <a:ln/>
+        </p:spPr>
+        <p:txBody>
+          <a:bodyPr wrap="square" lIns="0" tIns="0" rIns="0" bIns="0" rtlCol="0" anchor="ctr"/>
           <a:lstStyle/>
           <a:p>
             <a:pPr algn="ctr" indent="0" marL="0">
               <a:buNone/>
             </a:pPr>
             <a:r>
-              <a:rPr lang="en-US" sz="1400" dirty="0">
-                <a:solidFill>
-                  <a:schemeClr val="bg2"/>
-                </a:solidFill>
-              </a:rPr>
-              <a:t>notebook checkpoints, every one PASS</a:t>
-            </a:r>
-            <a:endParaRPr lang="en-US" sz="1400" dirty="0"/>
-          </a:p>
-        </p:txBody>
-      </p:sp>
-      <p:sp>
-        <p:nvSpPr>
-          <p:cNvPr id="8" name="Stat card"/>
+              <a:rPr lang="en-US" sz="1500" b="1" dirty="0">
+                <a:solidFill>
+                  <a:schemeClr val="bg1"/>
+                </a:solidFill>
+                <a:latin typeface="Calibri" pitchFamily="34" charset="0"/>
+                <a:ea typeface="Calibri" pitchFamily="34" charset="-122"/>
+                <a:cs typeface="Calibri" pitchFamily="34" charset="-120"/>
+              </a:rPr>
+              <a:t>2</a:t>
+            </a:r>
+            <a:endParaRPr lang="en-US" sz="1500" dirty="0"/>
+          </a:p>
+        </p:txBody>
+      </p:sp>
+      <p:sp>
+        <p:nvSpPr>
+          <p:cNvPr id="10" name="Row text"/>
+          <p:cNvSpPr txBox="1"/>
+          <p:nvPr/>
+        </p:nvSpPr>
+        <p:spPr>
+          <a:xfrm>
+            <a:off x="1325880" y="2587752"/>
+            <a:ext cx="10317175" cy="841248"/>
+          </a:xfrm>
+          <a:prstGeom prst="rect">
+            <a:avLst/>
+          </a:prstGeom>
+          <a:noFill/>
+          <a:ln/>
+        </p:spPr>
+        <p:txBody>
+          <a:bodyPr wrap="square" lIns="0" tIns="0" rIns="0" bIns="0" rtlCol="0" anchor="ctr"/>
+          <a:lstStyle/>
+          <a:p>
+            <a:pPr indent="0" marL="0">
+              <a:buNone/>
+            </a:pPr>
+            <a:r>
+              <a:rPr lang="en-US" sz="1500" dirty="0">
+                <a:solidFill>
+                  <a:schemeClr val="tx1"/>
+                </a:solidFill>
+              </a:rPr>
+              <a:t>Linear commitments over a box, a budget, or a ball have linear or cone counterparts; the price of robustness rises with the set; a set with probability 1 - α under a law promises the chance 1 - α.</a:t>
+            </a:r>
+            <a:endParaRPr lang="en-US" sz="1500" dirty="0"/>
+          </a:p>
+        </p:txBody>
+      </p:sp>
+      <p:sp>
+        <p:nvSpPr>
+          <p:cNvPr id="11" name="Number"/>
           <p:cNvSpPr/>
           <p:nvPr/>
         </p:nvSpPr>
         <p:spPr>
           <a:xfrm>
-            <a:off x="3390824" y="1691640"/>
-            <a:ext cx="2567864" cy="1691640"/>
-          </a:xfrm>
-          <a:prstGeom prst="roundRect">
-            <a:avLst>
-              <a:gd name="adj" fmla="val 4324"/>
-            </a:avLst>
+            <a:off x="548640" y="3529584"/>
+            <a:ext cx="566928" cy="566928"/>
+          </a:xfrm>
+          <a:prstGeom prst="ellipse">
+            <a:avLst/>
           </a:prstGeom>
           <a:solidFill>
-            <a:schemeClr val="bg2"/>
+            <a:schemeClr val="accent1"/>
           </a:solidFill>
-          <a:ln w="9525">
+          <a:ln w="6350">
             <a:solidFill>
-              <a:srgbClr val="C4CBD8"/>
+              <a:schemeClr val="accent1"/>
             </a:solidFill>
             <a:prstDash val="solid"/>
           </a:ln>
@@ -20509,14 +21027,14 @@
       </p:sp>
       <p:sp>
         <p:nvSpPr>
-          <p:cNvPr id="9" name="Stat value"/>
+          <p:cNvPr id="12" name="Text 9"/>
           <p:cNvSpPr txBox="1"/>
           <p:nvPr/>
         </p:nvSpPr>
         <p:spPr>
           <a:xfrm>
-            <a:off x="3527984" y="1801368"/>
-            <a:ext cx="2293544" cy="914400"/>
+            <a:off x="548640" y="3529584"/>
+            <a:ext cx="566928" cy="566928"/>
           </a:xfrm>
           <a:prstGeom prst="rect">
             <a:avLst/>
@@ -20532,30 +21050,30 @@
               <a:buNone/>
             </a:pPr>
             <a:r>
-              <a:rPr lang="en-US" sz="4400" b="1" dirty="0">
-                <a:solidFill>
-                  <a:schemeClr val="tx1"/>
-                </a:solidFill>
-                <a:latin typeface="Cambria" pitchFamily="34" charset="0"/>
-                <a:ea typeface="Cambria" pitchFamily="34" charset="-122"/>
-                <a:cs typeface="Cambria" pitchFamily="34" charset="-120"/>
-              </a:rPr>
-              <a:t>133</a:t>
-            </a:r>
-            <a:endParaRPr lang="en-US" sz="4400" dirty="0"/>
-          </a:p>
-        </p:txBody>
-      </p:sp>
-      <p:sp>
-        <p:nvSpPr>
-          <p:cNvPr id="10" name="Stat label"/>
+              <a:rPr lang="en-US" sz="1500" b="1" dirty="0">
+                <a:solidFill>
+                  <a:schemeClr val="bg1"/>
+                </a:solidFill>
+                <a:latin typeface="Calibri" pitchFamily="34" charset="0"/>
+                <a:ea typeface="Calibri" pitchFamily="34" charset="-122"/>
+                <a:cs typeface="Calibri" pitchFamily="34" charset="-120"/>
+              </a:rPr>
+              <a:t>3</a:t>
+            </a:r>
+            <a:endParaRPr lang="en-US" sz="1500" dirty="0"/>
+          </a:p>
+        </p:txBody>
+      </p:sp>
+      <p:sp>
+        <p:nvSpPr>
+          <p:cNvPr id="13" name="Row text"/>
           <p:cNvSpPr txBox="1"/>
           <p:nvPr/>
         </p:nvSpPr>
         <p:spPr>
           <a:xfrm>
-            <a:off x="3527984" y="2697480"/>
-            <a:ext cx="2293544" cy="612648"/>
+            <a:off x="1325880" y="3483864"/>
+            <a:ext cx="10317175" cy="841248"/>
           </a:xfrm>
           <a:prstGeom prst="rect">
             <a:avLst/>
@@ -20564,46 +21082,144 @@
           <a:ln/>
         </p:spPr>
         <p:txBody>
-          <a:bodyPr wrap="square" lIns="0" tIns="0" rIns="0" bIns="0" rtlCol="0" anchor="t"/>
+          <a:bodyPr wrap="square" lIns="0" tIns="0" rIns="0" bIns="0" rtlCol="0" anchor="ctr"/>
+          <a:lstStyle/>
+          <a:p>
+            <a:pPr indent="0" marL="0">
+              <a:buNone/>
+            </a:pPr>
+            <a:r>
+              <a:rPr lang="en-US" sz="1500" dirty="0">
+                <a:solidFill>
+                  <a:schemeClr val="tx1"/>
+                </a:solidFill>
+              </a:rPr>
+              <a:t>Graded declarations turn offices' words into nested sets. A decision robust on the α-cut fails only where the offices graded futures below α, and the max-min choice balances a graded goal for cost against the necessity of safety.</a:t>
+            </a:r>
+            <a:endParaRPr lang="en-US" sz="1500" dirty="0"/>
+          </a:p>
+        </p:txBody>
+      </p:sp>
+      <p:sp>
+        <p:nvSpPr>
+          <p:cNvPr id="14" name="Number"/>
+          <p:cNvSpPr/>
+          <p:nvPr/>
+        </p:nvSpPr>
+        <p:spPr>
+          <a:xfrm>
+            <a:off x="548640" y="4425696"/>
+            <a:ext cx="566928" cy="566928"/>
+          </a:xfrm>
+          <a:prstGeom prst="ellipse">
+            <a:avLst/>
+          </a:prstGeom>
+          <a:solidFill>
+            <a:schemeClr val="accent1"/>
+          </a:solidFill>
+          <a:ln w="6350">
+            <a:solidFill>
+              <a:schemeClr val="accent1"/>
+            </a:solidFill>
+            <a:prstDash val="solid"/>
+          </a:ln>
+        </p:spPr>
+      </p:sp>
+      <p:sp>
+        <p:nvSpPr>
+          <p:cNvPr id="15" name="Text 12"/>
+          <p:cNvSpPr txBox="1"/>
+          <p:nvPr/>
+        </p:nvSpPr>
+        <p:spPr>
+          <a:xfrm>
+            <a:off x="548640" y="4425696"/>
+            <a:ext cx="566928" cy="566928"/>
+          </a:xfrm>
+          <a:prstGeom prst="rect">
+            <a:avLst/>
+          </a:prstGeom>
+          <a:noFill/>
+          <a:ln/>
+        </p:spPr>
+        <p:txBody>
+          <a:bodyPr wrap="square" lIns="0" tIns="0" rIns="0" bIns="0" rtlCol="0" anchor="ctr"/>
           <a:lstStyle/>
           <a:p>
             <a:pPr algn="ctr" indent="0" marL="0">
               <a:buNone/>
             </a:pPr>
             <a:r>
-              <a:rPr lang="en-US" sz="1400" dirty="0">
-                <a:solidFill>
-                  <a:schemeClr val="tx2"/>
-                </a:solidFill>
-              </a:rPr>
-              <a:t>workbook checks against the engine, ALL PASS</a:t>
-            </a:r>
-            <a:endParaRPr lang="en-US" sz="1400" dirty="0"/>
-          </a:p>
-        </p:txBody>
-      </p:sp>
-      <p:sp>
-        <p:nvSpPr>
-          <p:cNvPr id="11" name="Stat card"/>
+              <a:rPr lang="en-US" sz="1500" b="1" dirty="0">
+                <a:solidFill>
+                  <a:schemeClr val="bg1"/>
+                </a:solidFill>
+                <a:latin typeface="Calibri" pitchFamily="34" charset="0"/>
+                <a:ea typeface="Calibri" pitchFamily="34" charset="-122"/>
+                <a:cs typeface="Calibri" pitchFamily="34" charset="-120"/>
+              </a:rPr>
+              <a:t>4</a:t>
+            </a:r>
+            <a:endParaRPr lang="en-US" sz="1500" dirty="0"/>
+          </a:p>
+        </p:txBody>
+      </p:sp>
+      <p:sp>
+        <p:nvSpPr>
+          <p:cNvPr id="16" name="Row text"/>
+          <p:cNvSpPr txBox="1"/>
+          <p:nvPr/>
+        </p:nvSpPr>
+        <p:spPr>
+          <a:xfrm>
+            <a:off x="1325880" y="4379976"/>
+            <a:ext cx="10317175" cy="841248"/>
+          </a:xfrm>
+          <a:prstGeom prst="rect">
+            <a:avLst/>
+          </a:prstGeom>
+          <a:noFill/>
+          <a:ln/>
+        </p:spPr>
+        <p:txBody>
+          <a:bodyPr wrap="square" lIns="0" tIns="0" rIns="0" bIns="0" rtlCol="0" anchor="ctr"/>
+          <a:lstStyle/>
+          <a:p>
+            <a:pPr indent="0" marL="0">
+              <a:buNone/>
+            </a:pPr>
+            <a:r>
+              <a:rPr lang="en-US" sz="1500" dirty="0">
+                <a:solidFill>
+                  <a:schemeClr val="tx1"/>
+                </a:solidFill>
+              </a:rPr>
+              <a:t>Neuro-fuzzy rules write decision surfaces in the declarations' language and learn them by least squares and gradient steps; trained rule by rule they stay readable. Their proposals are adopted only after the exact check.</a:t>
+            </a:r>
+            <a:endParaRPr lang="en-US" sz="1500" dirty="0"/>
+          </a:p>
+        </p:txBody>
+      </p:sp>
+      <p:sp>
+        <p:nvSpPr>
+          <p:cNvPr id="17" name="Number"/>
           <p:cNvSpPr/>
           <p:nvPr/>
         </p:nvSpPr>
         <p:spPr>
           <a:xfrm>
-            <a:off x="6233008" y="1691640"/>
-            <a:ext cx="2567864" cy="1691640"/>
-          </a:xfrm>
-          <a:prstGeom prst="roundRect">
-            <a:avLst>
-              <a:gd name="adj" fmla="val 4324"/>
-            </a:avLst>
+            <a:off x="548640" y="5321808"/>
+            <a:ext cx="566928" cy="566928"/>
+          </a:xfrm>
+          <a:prstGeom prst="ellipse">
+            <a:avLst/>
           </a:prstGeom>
           <a:solidFill>
-            <a:schemeClr val="bg2"/>
+            <a:schemeClr val="accent1"/>
           </a:solidFill>
-          <a:ln w="9525">
+          <a:ln w="6350">
             <a:solidFill>
-              <a:srgbClr val="C4CBD8"/>
+              <a:schemeClr val="accent1"/>
             </a:solidFill>
             <a:prstDash val="solid"/>
           </a:ln>
@@ -20611,14 +21227,14 @@
       </p:sp>
       <p:sp>
         <p:nvSpPr>
-          <p:cNvPr id="12" name="Stat value"/>
+          <p:cNvPr id="18" name="Text 15"/>
           <p:cNvSpPr txBox="1"/>
           <p:nvPr/>
         </p:nvSpPr>
         <p:spPr>
           <a:xfrm>
-            <a:off x="6370168" y="1801368"/>
-            <a:ext cx="2293544" cy="914400"/>
+            <a:off x="548640" y="5321808"/>
+            <a:ext cx="566928" cy="566928"/>
           </a:xfrm>
           <a:prstGeom prst="rect">
             <a:avLst/>
@@ -20634,30 +21250,30 @@
               <a:buNone/>
             </a:pPr>
             <a:r>
-              <a:rPr lang="en-US" sz="4400" b="1" dirty="0">
-                <a:solidFill>
-                  <a:schemeClr val="tx1"/>
-                </a:solidFill>
-                <a:latin typeface="Cambria" pitchFamily="34" charset="0"/>
-                <a:ea typeface="Cambria" pitchFamily="34" charset="-122"/>
-                <a:cs typeface="Cambria" pitchFamily="34" charset="-120"/>
-              </a:rPr>
-              <a:t>26210</a:t>
-            </a:r>
-            <a:endParaRPr lang="en-US" sz="4400" dirty="0"/>
-          </a:p>
-        </p:txBody>
-      </p:sp>
-      <p:sp>
-        <p:nvSpPr>
-          <p:cNvPr id="13" name="Stat label"/>
+              <a:rPr lang="en-US" sz="1500" b="1" dirty="0">
+                <a:solidFill>
+                  <a:schemeClr val="bg1"/>
+                </a:solidFill>
+                <a:latin typeface="Calibri" pitchFamily="34" charset="0"/>
+                <a:ea typeface="Calibri" pitchFamily="34" charset="-122"/>
+                <a:cs typeface="Calibri" pitchFamily="34" charset="-120"/>
+              </a:rPr>
+              <a:t>5</a:t>
+            </a:r>
+            <a:endParaRPr lang="en-US" sz="1500" dirty="0"/>
+          </a:p>
+        </p:txBody>
+      </p:sp>
+      <p:sp>
+        <p:nvSpPr>
+          <p:cNvPr id="19" name="Row text"/>
           <p:cNvSpPr txBox="1"/>
           <p:nvPr/>
         </p:nvSpPr>
         <p:spPr>
           <a:xfrm>
-            <a:off x="6370168" y="2697480"/>
-            <a:ext cx="2293544" cy="612648"/>
+            <a:off x="1325880" y="5276088"/>
+            <a:ext cx="10317175" cy="841248"/>
           </a:xfrm>
           <a:prstGeom prst="rect">
             <a:avLst/>
@@ -20666,197 +21282,21 @@
           <a:ln/>
         </p:spPr>
         <p:txBody>
-          <a:bodyPr wrap="square" lIns="0" tIns="0" rIns="0" bIns="0" rtlCol="0" anchor="t"/>
+          <a:bodyPr wrap="square" lIns="0" tIns="0" rIns="0" bIns="0" rtlCol="0" anchor="ctr"/>
           <a:lstStyle/>
           <a:p>
-            <a:pPr algn="ctr" indent="0" marL="0">
+            <a:pPr indent="0" marL="0">
               <a:buNone/>
             </a:pPr>
             <a:r>
-              <a:rPr lang="en-US" sz="1400" dirty="0">
-                <a:solidFill>
-                  <a:schemeClr val="tx2"/>
-                </a:solidFill>
-              </a:rPr>
-              <a:t>the lab's seed</a:t>
-            </a:r>
-            <a:endParaRPr lang="en-US" sz="1400" dirty="0"/>
-          </a:p>
-        </p:txBody>
-      </p:sp>
-      <p:sp>
-        <p:nvSpPr>
-          <p:cNvPr id="14" name="Stat card"/>
-          <p:cNvSpPr/>
-          <p:nvPr/>
-        </p:nvSpPr>
-        <p:spPr>
-          <a:xfrm>
-            <a:off x="9075191" y="1691640"/>
-            <a:ext cx="2567864" cy="1691640"/>
-          </a:xfrm>
-          <a:prstGeom prst="roundRect">
-            <a:avLst>
-              <a:gd name="adj" fmla="val 4324"/>
-            </a:avLst>
-          </a:prstGeom>
-          <a:solidFill>
-            <a:schemeClr val="bg2"/>
-          </a:solidFill>
-          <a:ln w="9525">
-            <a:solidFill>
-              <a:srgbClr val="C4CBD8"/>
-            </a:solidFill>
-            <a:prstDash val="solid"/>
-          </a:ln>
-        </p:spPr>
-      </p:sp>
-      <p:sp>
-        <p:nvSpPr>
-          <p:cNvPr id="15" name="Stat value"/>
-          <p:cNvSpPr txBox="1"/>
-          <p:nvPr/>
-        </p:nvSpPr>
-        <p:spPr>
-          <a:xfrm>
-            <a:off x="9212351" y="1801368"/>
-            <a:ext cx="2293544" cy="914400"/>
-          </a:xfrm>
-          <a:prstGeom prst="rect">
-            <a:avLst/>
-          </a:prstGeom>
-          <a:noFill/>
-          <a:ln/>
-        </p:spPr>
-        <p:txBody>
-          <a:bodyPr wrap="square" lIns="0" tIns="0" rIns="0" bIns="0" rtlCol="0" anchor="ctr"/>
-          <a:lstStyle/>
-          <a:p>
-            <a:pPr algn="ctr" indent="0" marL="0">
-              <a:buNone/>
-            </a:pPr>
-            <a:r>
-              <a:rPr lang="en-US" sz="3000" b="1" dirty="0">
+              <a:rPr lang="en-US" sz="1500" dirty="0">
                 <a:solidFill>
                   <a:schemeClr val="tx1"/>
                 </a:solidFill>
-                <a:latin typeface="Cambria" pitchFamily="34" charset="0"/>
-                <a:ea typeface="Cambria" pitchFamily="34" charset="-122"/>
-                <a:cs typeface="Cambria" pitchFamily="34" charset="-120"/>
-              </a:rPr>
-              <a:t>AXIOM-10</a:t>
-            </a:r>
-            <a:endParaRPr lang="en-US" sz="3000" dirty="0"/>
-          </a:p>
-        </p:txBody>
-      </p:sp>
-      <p:sp>
-        <p:nvSpPr>
-          <p:cNvPr id="16" name="Stat label"/>
-          <p:cNvSpPr txBox="1"/>
-          <p:nvPr/>
-        </p:nvSpPr>
-        <p:spPr>
-          <a:xfrm>
-            <a:off x="9212351" y="2697480"/>
-            <a:ext cx="2293544" cy="612648"/>
-          </a:xfrm>
-          <a:prstGeom prst="rect">
-            <a:avLst/>
-          </a:prstGeom>
-          <a:noFill/>
-          <a:ln/>
-        </p:spPr>
-        <p:txBody>
-          <a:bodyPr wrap="square" lIns="0" tIns="0" rIns="0" bIns="0" rtlCol="0" anchor="t"/>
-          <a:lstStyle/>
-          <a:p>
-            <a:pPr algn="ctr" indent="0" marL="0">
-              <a:buNone/>
-            </a:pPr>
-            <a:r>
-              <a:rPr lang="en-US" sz="1400" dirty="0">
-                <a:solidFill>
-                  <a:schemeClr val="tx2"/>
-                </a:solidFill>
-              </a:rPr>
-              <a:t>AXIOM Lab 2.10</a:t>
-            </a:r>
-            <a:endParaRPr lang="en-US" sz="1400" dirty="0"/>
-          </a:p>
-        </p:txBody>
-      </p:sp>
-      <p:sp>
-        <p:nvSpPr>
-          <p:cNvPr id="17" name="Bullets"/>
-          <p:cNvSpPr txBox="1"/>
-          <p:nvPr/>
-        </p:nvSpPr>
-        <p:spPr>
-          <a:xfrm>
-            <a:off x="548640" y="3703320"/>
-            <a:ext cx="11094415" cy="2468880"/>
-          </a:xfrm>
-          <a:prstGeom prst="rect">
-            <a:avLst/>
-          </a:prstGeom>
-          <a:noFill/>
-          <a:ln/>
-        </p:spPr>
-        <p:txBody>
-          <a:bodyPr wrap="square" lIns="635" tIns="635" rIns="635" bIns="635" rtlCol="0" anchor="t"/>
-          <a:lstStyle/>
-          <a:p>
-            <a:pPr marL="228600" indent="-228600">
-              <a:spcAft>
-                <a:spcPts val="800"/>
-              </a:spcAft>
-              <a:buSzPct val="100000"/>
-              <a:buChar char="•"/>
-            </a:pPr>
-            <a:r>
-              <a:rPr lang="en-US" sz="1700" b="1" dirty="0">
-                <a:solidFill>
-                  <a:schemeClr val="tx1"/>
-                </a:solidFill>
-              </a:rPr>
-              <a:t>Notebook</a:t>
-            </a:r>
-            <a:r>
-              <a:rPr lang="en-US" sz="1700" dirty="0">
-                <a:solidFill>
-                  <a:schemeClr val="tx1"/>
-                </a:solidFill>
-              </a:rPr>
-              <a:t> DCT_V2_Ch10_Lab.ipynb: Worked Example 10.1 and the lab's five steps in five panels, on the book's paths and the fresh ones</a:t>
-            </a:r>
-            <a:endParaRPr lang="en-US" sz="1700" dirty="0"/>
-          </a:p>
-          <a:p>
-            <a:pPr marL="228600" indent="-228600">
-              <a:spcAft>
-                <a:spcPts val="800"/>
-              </a:spcAft>
-              <a:buSzPct val="100000"/>
-              <a:buChar char="•"/>
-            </a:pPr>
-            <a:r>
-              <a:rPr lang="en-US" sz="1700" b="1" dirty="0">
-                <a:solidFill>
-                  <a:schemeClr val="tx1"/>
-                </a:solidFill>
-              </a:rPr>
-              <a:t>Workbook</a:t>
-            </a:r>
-            <a:r>
-              <a:rPr lang="en-US" sz="1700" dirty="0">
-                <a:solidFill>
-                  <a:schemeClr val="tx1"/>
-                </a:solidFill>
-              </a:rPr>
-              <a:t> DCT_V2_Ch10_Lab.xlsx: margins, robust packages, the graded cuts and the max-min choice, the frontier's costs, and the rules, in formulas</a:t>
-            </a:r>
-            <a:endParaRPr lang="en-US" sz="1700" dirty="0"/>
+              </a:rPr>
+              <a:t>Robust packages, judged by a law, cost a little more than the cheapest package for the same chance, but do not need the law. Under a set, a rule helps only if its reading comes before the damage.</a:t>
+            </a:r>
+            <a:endParaRPr lang="en-US" sz="1500" dirty="0"/>
           </a:p>
         </p:txBody>
       </p:sp>
@@ -20962,6 +21402,637 @@
                   <a:schemeClr val="accent1"/>
                 </a:solidFill>
               </a:rPr>
+              <a:t>THIS WEEK'S LABORATORY</a:t>
+            </a:r>
+            <a:endParaRPr lang="en-US" sz="1200" dirty="0"/>
+          </a:p>
+        </p:txBody>
+      </p:sp>
+      <p:sp>
+        <p:nvSpPr>
+          <p:cNvPr id="4" name="Text 1"/>
+          <p:cNvSpPr/>
+          <p:nvPr>
+            <p:ph idx="103" type="title" hasCustomPrompt="1"/>
+          </p:nvPr>
+        </p:nvSpPr>
+        <p:spPr>
+          <a:xfrm>
+            <a:off x="548640" y="658368"/>
+            <a:ext cx="11094415" cy="868680"/>
+          </a:xfrm>
+          <a:prstGeom prst="rect">
+            <a:avLst/>
+          </a:prstGeom>
+          <a:noFill/>
+          <a:ln/>
+        </p:spPr>
+        <p:txBody>
+          <a:bodyPr wrap="square" lIns="0" tIns="0" rIns="0" bIns="0" rtlCol="0" anchor="t"/>
+          <a:lstStyle/>
+          <a:p>
+            <a:pPr algn="l" indent="0" marL="0">
+              <a:buNone/>
+            </a:pPr>
+            <a:r>
+              <a:rPr lang="en-US" sz="3200" b="1" dirty="0">
+                <a:solidFill>
+                  <a:schemeClr val="tx1"/>
+                </a:solidFill>
+                <a:latin typeface="Cambria" pitchFamily="34" charset="0"/>
+                <a:ea typeface="Cambria" pitchFamily="34" charset="-122"/>
+                <a:cs typeface="Cambria" pitchFamily="34" charset="-120"/>
+              </a:rPr>
+              <a:t>Notebook and workbook reproduce the book</a:t>
+            </a:r>
+            <a:endParaRPr lang="en-US" sz="3200" dirty="0"/>
+          </a:p>
+        </p:txBody>
+      </p:sp>
+      <p:sp>
+        <p:nvSpPr>
+          <p:cNvPr id="5" name="Stat card"/>
+          <p:cNvSpPr/>
+          <p:nvPr/>
+        </p:nvSpPr>
+        <p:spPr>
+          <a:xfrm>
+            <a:off x="548640" y="1691640"/>
+            <a:ext cx="2567864" cy="1691640"/>
+          </a:xfrm>
+          <a:prstGeom prst="roundRect">
+            <a:avLst>
+              <a:gd name="adj" fmla="val 4324"/>
+            </a:avLst>
+          </a:prstGeom>
+          <a:solidFill>
+            <a:schemeClr val="tx1"/>
+          </a:solidFill>
+          <a:ln w="9525">
+            <a:solidFill>
+              <a:srgbClr val="0F1E3D"/>
+            </a:solidFill>
+            <a:prstDash val="solid"/>
+          </a:ln>
+        </p:spPr>
+      </p:sp>
+      <p:sp>
+        <p:nvSpPr>
+          <p:cNvPr id="6" name="Stat value"/>
+          <p:cNvSpPr txBox="1"/>
+          <p:nvPr/>
+        </p:nvSpPr>
+        <p:spPr>
+          <a:xfrm>
+            <a:off x="685800" y="1801368"/>
+            <a:ext cx="2293544" cy="914400"/>
+          </a:xfrm>
+          <a:prstGeom prst="rect">
+            <a:avLst/>
+          </a:prstGeom>
+          <a:noFill/>
+          <a:ln/>
+        </p:spPr>
+        <p:txBody>
+          <a:bodyPr wrap="square" lIns="0" tIns="0" rIns="0" bIns="0" rtlCol="0" anchor="ctr"/>
+          <a:lstStyle/>
+          <a:p>
+            <a:pPr algn="ctr" indent="0" marL="0">
+              <a:buNone/>
+            </a:pPr>
+            <a:r>
+              <a:rPr lang="en-US" sz="4400" b="1" dirty="0">
+                <a:solidFill>
+                  <a:schemeClr val="accent1"/>
+                </a:solidFill>
+                <a:latin typeface="Cambria" pitchFamily="34" charset="0"/>
+                <a:ea typeface="Cambria" pitchFamily="34" charset="-122"/>
+                <a:cs typeface="Cambria" pitchFamily="34" charset="-120"/>
+              </a:rPr>
+              <a:t>247</a:t>
+            </a:r>
+            <a:endParaRPr lang="en-US" sz="4400" dirty="0"/>
+          </a:p>
+        </p:txBody>
+      </p:sp>
+      <p:sp>
+        <p:nvSpPr>
+          <p:cNvPr id="7" name="Stat label"/>
+          <p:cNvSpPr txBox="1"/>
+          <p:nvPr/>
+        </p:nvSpPr>
+        <p:spPr>
+          <a:xfrm>
+            <a:off x="685800" y="2697480"/>
+            <a:ext cx="2293544" cy="612648"/>
+          </a:xfrm>
+          <a:prstGeom prst="rect">
+            <a:avLst/>
+          </a:prstGeom>
+          <a:noFill/>
+          <a:ln/>
+        </p:spPr>
+        <p:txBody>
+          <a:bodyPr wrap="square" lIns="0" tIns="0" rIns="0" bIns="0" rtlCol="0" anchor="t"/>
+          <a:lstStyle/>
+          <a:p>
+            <a:pPr algn="ctr" indent="0" marL="0">
+              <a:buNone/>
+            </a:pPr>
+            <a:r>
+              <a:rPr lang="en-US" sz="1400" dirty="0">
+                <a:solidFill>
+                  <a:schemeClr val="bg2"/>
+                </a:solidFill>
+              </a:rPr>
+              <a:t>notebook checkpoints, every one PASS</a:t>
+            </a:r>
+            <a:endParaRPr lang="en-US" sz="1400" dirty="0"/>
+          </a:p>
+        </p:txBody>
+      </p:sp>
+      <p:sp>
+        <p:nvSpPr>
+          <p:cNvPr id="8" name="Stat card"/>
+          <p:cNvSpPr/>
+          <p:nvPr/>
+        </p:nvSpPr>
+        <p:spPr>
+          <a:xfrm>
+            <a:off x="3390824" y="1691640"/>
+            <a:ext cx="2567864" cy="1691640"/>
+          </a:xfrm>
+          <a:prstGeom prst="roundRect">
+            <a:avLst>
+              <a:gd name="adj" fmla="val 4324"/>
+            </a:avLst>
+          </a:prstGeom>
+          <a:solidFill>
+            <a:schemeClr val="bg2"/>
+          </a:solidFill>
+          <a:ln w="9525">
+            <a:solidFill>
+              <a:srgbClr val="C4CBD8"/>
+            </a:solidFill>
+            <a:prstDash val="solid"/>
+          </a:ln>
+        </p:spPr>
+      </p:sp>
+      <p:sp>
+        <p:nvSpPr>
+          <p:cNvPr id="9" name="Stat value"/>
+          <p:cNvSpPr txBox="1"/>
+          <p:nvPr/>
+        </p:nvSpPr>
+        <p:spPr>
+          <a:xfrm>
+            <a:off x="3527984" y="1801368"/>
+            <a:ext cx="2293544" cy="914400"/>
+          </a:xfrm>
+          <a:prstGeom prst="rect">
+            <a:avLst/>
+          </a:prstGeom>
+          <a:noFill/>
+          <a:ln/>
+        </p:spPr>
+        <p:txBody>
+          <a:bodyPr wrap="square" lIns="0" tIns="0" rIns="0" bIns="0" rtlCol="0" anchor="ctr"/>
+          <a:lstStyle/>
+          <a:p>
+            <a:pPr algn="ctr" indent="0" marL="0">
+              <a:buNone/>
+            </a:pPr>
+            <a:r>
+              <a:rPr lang="en-US" sz="4400" b="1" dirty="0">
+                <a:solidFill>
+                  <a:schemeClr val="tx1"/>
+                </a:solidFill>
+                <a:latin typeface="Cambria" pitchFamily="34" charset="0"/>
+                <a:ea typeface="Cambria" pitchFamily="34" charset="-122"/>
+                <a:cs typeface="Cambria" pitchFamily="34" charset="-120"/>
+              </a:rPr>
+              <a:t>133</a:t>
+            </a:r>
+            <a:endParaRPr lang="en-US" sz="4400" dirty="0"/>
+          </a:p>
+        </p:txBody>
+      </p:sp>
+      <p:sp>
+        <p:nvSpPr>
+          <p:cNvPr id="10" name="Stat label"/>
+          <p:cNvSpPr txBox="1"/>
+          <p:nvPr/>
+        </p:nvSpPr>
+        <p:spPr>
+          <a:xfrm>
+            <a:off x="3527984" y="2697480"/>
+            <a:ext cx="2293544" cy="612648"/>
+          </a:xfrm>
+          <a:prstGeom prst="rect">
+            <a:avLst/>
+          </a:prstGeom>
+          <a:noFill/>
+          <a:ln/>
+        </p:spPr>
+        <p:txBody>
+          <a:bodyPr wrap="square" lIns="0" tIns="0" rIns="0" bIns="0" rtlCol="0" anchor="t"/>
+          <a:lstStyle/>
+          <a:p>
+            <a:pPr algn="ctr" indent="0" marL="0">
+              <a:buNone/>
+            </a:pPr>
+            <a:r>
+              <a:rPr lang="en-US" sz="1400" dirty="0">
+                <a:solidFill>
+                  <a:schemeClr val="tx2"/>
+                </a:solidFill>
+              </a:rPr>
+              <a:t>workbook checks against the engine, ALL PASS</a:t>
+            </a:r>
+            <a:endParaRPr lang="en-US" sz="1400" dirty="0"/>
+          </a:p>
+        </p:txBody>
+      </p:sp>
+      <p:sp>
+        <p:nvSpPr>
+          <p:cNvPr id="11" name="Stat card"/>
+          <p:cNvSpPr/>
+          <p:nvPr/>
+        </p:nvSpPr>
+        <p:spPr>
+          <a:xfrm>
+            <a:off x="6233008" y="1691640"/>
+            <a:ext cx="2567864" cy="1691640"/>
+          </a:xfrm>
+          <a:prstGeom prst="roundRect">
+            <a:avLst>
+              <a:gd name="adj" fmla="val 4324"/>
+            </a:avLst>
+          </a:prstGeom>
+          <a:solidFill>
+            <a:schemeClr val="bg2"/>
+          </a:solidFill>
+          <a:ln w="9525">
+            <a:solidFill>
+              <a:srgbClr val="C4CBD8"/>
+            </a:solidFill>
+            <a:prstDash val="solid"/>
+          </a:ln>
+        </p:spPr>
+      </p:sp>
+      <p:sp>
+        <p:nvSpPr>
+          <p:cNvPr id="12" name="Stat value"/>
+          <p:cNvSpPr txBox="1"/>
+          <p:nvPr/>
+        </p:nvSpPr>
+        <p:spPr>
+          <a:xfrm>
+            <a:off x="6370168" y="1801368"/>
+            <a:ext cx="2293544" cy="914400"/>
+          </a:xfrm>
+          <a:prstGeom prst="rect">
+            <a:avLst/>
+          </a:prstGeom>
+          <a:noFill/>
+          <a:ln/>
+        </p:spPr>
+        <p:txBody>
+          <a:bodyPr wrap="square" lIns="0" tIns="0" rIns="0" bIns="0" rtlCol="0" anchor="ctr"/>
+          <a:lstStyle/>
+          <a:p>
+            <a:pPr algn="ctr" indent="0" marL="0">
+              <a:buNone/>
+            </a:pPr>
+            <a:r>
+              <a:rPr lang="en-US" sz="4400" b="1" dirty="0">
+                <a:solidFill>
+                  <a:schemeClr val="tx1"/>
+                </a:solidFill>
+                <a:latin typeface="Cambria" pitchFamily="34" charset="0"/>
+                <a:ea typeface="Cambria" pitchFamily="34" charset="-122"/>
+                <a:cs typeface="Cambria" pitchFamily="34" charset="-120"/>
+              </a:rPr>
+              <a:t>26210</a:t>
+            </a:r>
+            <a:endParaRPr lang="en-US" sz="4400" dirty="0"/>
+          </a:p>
+        </p:txBody>
+      </p:sp>
+      <p:sp>
+        <p:nvSpPr>
+          <p:cNvPr id="13" name="Stat label"/>
+          <p:cNvSpPr txBox="1"/>
+          <p:nvPr/>
+        </p:nvSpPr>
+        <p:spPr>
+          <a:xfrm>
+            <a:off x="6370168" y="2697480"/>
+            <a:ext cx="2293544" cy="612648"/>
+          </a:xfrm>
+          <a:prstGeom prst="rect">
+            <a:avLst/>
+          </a:prstGeom>
+          <a:noFill/>
+          <a:ln/>
+        </p:spPr>
+        <p:txBody>
+          <a:bodyPr wrap="square" lIns="0" tIns="0" rIns="0" bIns="0" rtlCol="0" anchor="t"/>
+          <a:lstStyle/>
+          <a:p>
+            <a:pPr algn="ctr" indent="0" marL="0">
+              <a:buNone/>
+            </a:pPr>
+            <a:r>
+              <a:rPr lang="en-US" sz="1400" dirty="0">
+                <a:solidFill>
+                  <a:schemeClr val="tx2"/>
+                </a:solidFill>
+              </a:rPr>
+              <a:t>the lab's seed</a:t>
+            </a:r>
+            <a:endParaRPr lang="en-US" sz="1400" dirty="0"/>
+          </a:p>
+        </p:txBody>
+      </p:sp>
+      <p:sp>
+        <p:nvSpPr>
+          <p:cNvPr id="14" name="Stat card"/>
+          <p:cNvSpPr/>
+          <p:nvPr/>
+        </p:nvSpPr>
+        <p:spPr>
+          <a:xfrm>
+            <a:off x="9075191" y="1691640"/>
+            <a:ext cx="2567864" cy="1691640"/>
+          </a:xfrm>
+          <a:prstGeom prst="roundRect">
+            <a:avLst>
+              <a:gd name="adj" fmla="val 4324"/>
+            </a:avLst>
+          </a:prstGeom>
+          <a:solidFill>
+            <a:schemeClr val="bg2"/>
+          </a:solidFill>
+          <a:ln w="9525">
+            <a:solidFill>
+              <a:srgbClr val="C4CBD8"/>
+            </a:solidFill>
+            <a:prstDash val="solid"/>
+          </a:ln>
+        </p:spPr>
+      </p:sp>
+      <p:sp>
+        <p:nvSpPr>
+          <p:cNvPr id="15" name="Stat value"/>
+          <p:cNvSpPr txBox="1"/>
+          <p:nvPr/>
+        </p:nvSpPr>
+        <p:spPr>
+          <a:xfrm>
+            <a:off x="9212351" y="1801368"/>
+            <a:ext cx="2293544" cy="914400"/>
+          </a:xfrm>
+          <a:prstGeom prst="rect">
+            <a:avLst/>
+          </a:prstGeom>
+          <a:noFill/>
+          <a:ln/>
+        </p:spPr>
+        <p:txBody>
+          <a:bodyPr wrap="square" lIns="0" tIns="0" rIns="0" bIns="0" rtlCol="0" anchor="ctr"/>
+          <a:lstStyle/>
+          <a:p>
+            <a:pPr algn="ctr" indent="0" marL="0">
+              <a:buNone/>
+            </a:pPr>
+            <a:r>
+              <a:rPr lang="en-US" sz="3000" b="1" dirty="0">
+                <a:solidFill>
+                  <a:schemeClr val="tx1"/>
+                </a:solidFill>
+                <a:latin typeface="Cambria" pitchFamily="34" charset="0"/>
+                <a:ea typeface="Cambria" pitchFamily="34" charset="-122"/>
+                <a:cs typeface="Cambria" pitchFamily="34" charset="-120"/>
+              </a:rPr>
+              <a:t>AXIOM-10</a:t>
+            </a:r>
+            <a:endParaRPr lang="en-US" sz="3000" dirty="0"/>
+          </a:p>
+        </p:txBody>
+      </p:sp>
+      <p:sp>
+        <p:nvSpPr>
+          <p:cNvPr id="16" name="Stat label"/>
+          <p:cNvSpPr txBox="1"/>
+          <p:nvPr/>
+        </p:nvSpPr>
+        <p:spPr>
+          <a:xfrm>
+            <a:off x="9212351" y="2697480"/>
+            <a:ext cx="2293544" cy="612648"/>
+          </a:xfrm>
+          <a:prstGeom prst="rect">
+            <a:avLst/>
+          </a:prstGeom>
+          <a:noFill/>
+          <a:ln/>
+        </p:spPr>
+        <p:txBody>
+          <a:bodyPr wrap="square" lIns="0" tIns="0" rIns="0" bIns="0" rtlCol="0" anchor="t"/>
+          <a:lstStyle/>
+          <a:p>
+            <a:pPr algn="ctr" indent="0" marL="0">
+              <a:buNone/>
+            </a:pPr>
+            <a:r>
+              <a:rPr lang="en-US" sz="1400" dirty="0">
+                <a:solidFill>
+                  <a:schemeClr val="tx2"/>
+                </a:solidFill>
+              </a:rPr>
+              <a:t>AXIOM Lab 2.10</a:t>
+            </a:r>
+            <a:endParaRPr lang="en-US" sz="1400" dirty="0"/>
+          </a:p>
+        </p:txBody>
+      </p:sp>
+      <p:sp>
+        <p:nvSpPr>
+          <p:cNvPr id="17" name="Bullets"/>
+          <p:cNvSpPr txBox="1"/>
+          <p:nvPr/>
+        </p:nvSpPr>
+        <p:spPr>
+          <a:xfrm>
+            <a:off x="548640" y="3703320"/>
+            <a:ext cx="11094415" cy="2468880"/>
+          </a:xfrm>
+          <a:prstGeom prst="rect">
+            <a:avLst/>
+          </a:prstGeom>
+          <a:noFill/>
+          <a:ln/>
+        </p:spPr>
+        <p:txBody>
+          <a:bodyPr wrap="square" lIns="635" tIns="635" rIns="635" bIns="635" rtlCol="0" anchor="t"/>
+          <a:lstStyle/>
+          <a:p>
+            <a:pPr marL="228600" indent="-228600">
+              <a:spcAft>
+                <a:spcPts val="800"/>
+              </a:spcAft>
+              <a:buSzPct val="100000"/>
+              <a:buChar char="•"/>
+            </a:pPr>
+            <a:r>
+              <a:rPr lang="en-US" sz="1700" b="1" dirty="0">
+                <a:solidFill>
+                  <a:schemeClr val="tx1"/>
+                </a:solidFill>
+              </a:rPr>
+              <a:t>Notebook</a:t>
+            </a:r>
+            <a:r>
+              <a:rPr lang="en-US" sz="1700" dirty="0">
+                <a:solidFill>
+                  <a:schemeClr val="tx1"/>
+                </a:solidFill>
+              </a:rPr>
+              <a:t> DCT_V2_Ch10_Lab.ipynb: Worked Example 10.1 and the lab's five steps in five panels, on the book's paths and the fresh ones</a:t>
+            </a:r>
+            <a:endParaRPr lang="en-US" sz="1700" dirty="0"/>
+          </a:p>
+          <a:p>
+            <a:pPr marL="228600" indent="-228600">
+              <a:spcAft>
+                <a:spcPts val="800"/>
+              </a:spcAft>
+              <a:buSzPct val="100000"/>
+              <a:buChar char="•"/>
+            </a:pPr>
+            <a:r>
+              <a:rPr lang="en-US" sz="1700" b="1" dirty="0">
+                <a:solidFill>
+                  <a:schemeClr val="tx1"/>
+                </a:solidFill>
+              </a:rPr>
+              <a:t>Workbook</a:t>
+            </a:r>
+            <a:r>
+              <a:rPr lang="en-US" sz="1700" dirty="0">
+                <a:solidFill>
+                  <a:schemeClr val="tx1"/>
+                </a:solidFill>
+              </a:rPr>
+              <a:t> DCT_V2_Ch10_Lab.xlsx: margins, robust packages, the graded cuts and the max-min choice, the frontier's costs, and the rules, in formulas</a:t>
+            </a:r>
+            <a:endParaRPr lang="en-US" sz="1700" dirty="0"/>
+          </a:p>
+        </p:txBody>
+      </p:sp>
+      <p:sp>
+        <p:nvSpPr>
+          <p:cNvPr id="25" name="Slide Number Placeholder 0"/>
+          <p:cNvSpPr>
+            <a:spLocks noGrp="1"/>
+          </p:cNvSpPr>
+          <p:nvPr>
+            <p:ph type="sldNum" sz="quarter" idx="4294967295"/>
+          </p:nvPr>
+        </p:nvSpPr>
+        <p:spPr>
+          <a:xfrm>
+            <a:off x="11094415" y="6382512"/>
+            <a:ext cx="548640" cy="237744"/>
+          </a:xfrm>
+          <a:prstGeom prst="rect">
+            <a:avLst/>
+          </a:prstGeom>
+          <a:extLst>
+            <a:ext uri="{C572A759-6A51-4108-AA02-DFA0A04FC94B}">
+              <ma14:wrappingTextBoxFlag xmlns:ma14="http://schemas.microsoft.com/office/mac/drawingml/2011/main" val="0"/>
+            </a:ext>
+          </a:extLst>
+        </p:spPr>
+        <p:txBody>
+          <a:bodyPr/>
+          <a:lstStyle>
+            <a:lvl1pPr>
+              <a:defRPr sz="1000">
+                <a:solidFill>
+                  <a:srgbClr val="5A6B82"/>
+                </a:solidFill>
+              </a:defRPr>
+            </a:lvl1pPr>
+          </a:lstStyle>
+          <a:p>
+            <a:pPr algn="r"/>
+            <a:fld id="{F7021451-1387-4CA6-816F-3879F97B5CBC}" type="slidenum">
+              <a:rPr b="0" lang="en-US"/>
+              <a:t>24</a:t>
+            </a:fld>
+            <a:endParaRPr lang="en-US"/>
+          </a:p>
+        </p:txBody>
+      </p:sp>
+    </p:spTree>
+  </p:cSld>
+  <p:clrMapOvr>
+    <a:masterClrMapping/>
+  </p:clrMapOvr>
+</p:sld>
+</file>
+
+<file path=ppt/slides/slide25.xml><?xml version="1.0" encoding="utf-8"?>
+<p:sld xmlns:a="http://schemas.openxmlformats.org/drawingml/2006/main" xmlns:r="http://schemas.openxmlformats.org/officeDocument/2006/relationships" xmlns:p="http://schemas.openxmlformats.org/presentationml/2006/main">
+  <p:cSld name="Slide 25">
+    <p:spTree>
+      <p:nvGrpSpPr>
+        <p:cNvPr id="1" name=""/>
+        <p:cNvGrpSpPr/>
+        <p:nvPr/>
+      </p:nvGrpSpPr>
+      <p:grpSpPr>
+        <a:xfrm>
+          <a:off x="0" y="0"/>
+          <a:ext cx="0" cy="0"/>
+          <a:chOff x="0" y="0"/>
+          <a:chExt cx="0" cy="0"/>
+        </a:xfrm>
+      </p:grpSpPr>
+      <p:sp>
+        <p:nvSpPr>
+          <p:cNvPr id="3" name="Text 1"/>
+          <p:cNvSpPr/>
+          <p:nvPr>
+            <p:ph idx="102" type="body" hasCustomPrompt="1"/>
+          </p:nvPr>
+        </p:nvSpPr>
+        <p:spPr>
+          <a:xfrm>
+            <a:off x="548640" y="347472"/>
+            <a:ext cx="11094415" cy="292608"/>
+          </a:xfrm>
+          <a:prstGeom prst="rect">
+            <a:avLst/>
+          </a:prstGeom>
+          <a:noFill/>
+          <a:ln/>
+        </p:spPr>
+        <p:txBody>
+          <a:bodyPr wrap="square" lIns="0" tIns="0" rIns="0" bIns="0" rtlCol="0"/>
+          <a:lstStyle/>
+          <a:p>
+            <a:pPr indent="0" marL="0">
+              <a:buNone/>
+            </a:pPr>
+            <a:r>
+              <a:rPr lang="en-US" sz="1200" b="1" spc="200" kern="0" dirty="0">
+                <a:solidFill>
+                  <a:schemeClr val="accent1"/>
+                </a:solidFill>
+              </a:rPr>
               <a:t>NEXT · CHAPTER 11</a:t>
             </a:r>
             <a:endParaRPr lang="en-US" sz="1200" dirty="0"/>
@@ -21148,7 +22219,7 @@
             <a:pPr algn="r"/>
             <a:fld id="{F7021451-1387-4CA6-816F-3879F97B5CBC}" type="slidenum">
               <a:rPr b="0" lang="en-US"/>
-              <a:t>24</a:t>
+              <a:t>25</a:t>
             </a:fld>
             <a:endParaRPr lang="en-US"/>
           </a:p>
@@ -21901,7 +22972,7 @@
                 <a:ea typeface="Cambria" pitchFamily="34" charset="-122"/>
                 <a:cs typeface="Cambria" pitchFamily="34" charset="-120"/>
               </a:rPr>
-              <a:t>Five sections, a worked example and a lab</a:t>
+              <a:t>Five sections, a worked example, a case and a lab</a:t>
             </a:r>
             <a:endParaRPr lang="en-US" sz="3200" dirty="0"/>
           </a:p>
@@ -22792,7 +23863,7 @@
                   <a:schemeClr val="accent1"/>
                 </a:solidFill>
               </a:rPr>
-              <a:t>AXIOM Lab 2.10</a:t>
+              <a:t>In Practice</a:t>
             </a:r>
             <a:endParaRPr lang="en-US" sz="1300" dirty="0"/>
           </a:p>
@@ -22831,7 +23902,7 @@
                 <a:ea typeface="Cambria" pitchFamily="34" charset="-122"/>
                 <a:cs typeface="Cambria" pitchFamily="34" charset="-120"/>
               </a:rPr>
-              <a:t>Guarantees Without Odds: Sets, Grades, and Rules</a:t>
+              <a:t>Ford Maps Its Supply Risk Without Odds</a:t>
             </a:r>
             <a:endParaRPr lang="en-US" sz="1500" dirty="0"/>
           </a:p>
@@ -22846,6 +23917,144 @@
         <p:spPr>
           <a:xfrm>
             <a:off x="6415888" y="5660136"/>
+            <a:ext cx="2202104" cy="384048"/>
+          </a:xfrm>
+          <a:prstGeom prst="rect">
+            <a:avLst/>
+          </a:prstGeom>
+          <a:noFill/>
+          <a:ln/>
+        </p:spPr>
+        <p:txBody>
+          <a:bodyPr wrap="square" lIns="0" tIns="0" rIns="0" bIns="0" rtlCol="0" anchor="t"/>
+          <a:lstStyle/>
+          <a:p>
+            <a:pPr indent="0" marL="0">
+              <a:buNone/>
+            </a:pPr>
+            <a:r>
+              <a:rPr lang="en-US" sz="1300" dirty="0">
+                <a:solidFill>
+                  <a:schemeClr val="tx2"/>
+                </a:solidFill>
+              </a:rPr>
+              <a:t>At a Glance · board questions</a:t>
+            </a:r>
+            <a:endParaRPr lang="en-US" sz="1300" dirty="0"/>
+          </a:p>
+        </p:txBody>
+      </p:sp>
+      <p:sp>
+        <p:nvSpPr>
+          <p:cNvPr id="33" name="Card"/>
+          <p:cNvSpPr/>
+          <p:nvPr/>
+        </p:nvSpPr>
+        <p:spPr>
+          <a:xfrm>
+            <a:off x="9075191" y="4069080"/>
+            <a:ext cx="2567864" cy="2103120"/>
+          </a:xfrm>
+          <a:prstGeom prst="roundRect">
+            <a:avLst>
+              <a:gd name="adj" fmla="val 3478"/>
+            </a:avLst>
+          </a:prstGeom>
+          <a:solidFill>
+            <a:schemeClr val="bg2"/>
+          </a:solidFill>
+          <a:ln w="9525">
+            <a:solidFill>
+              <a:srgbClr val="C4CBD8"/>
+            </a:solidFill>
+            <a:prstDash val="solid"/>
+          </a:ln>
+        </p:spPr>
+      </p:sp>
+      <p:sp>
+        <p:nvSpPr>
+          <p:cNvPr id="34" name="Card label"/>
+          <p:cNvSpPr txBox="1"/>
+          <p:nvPr/>
+        </p:nvSpPr>
+        <p:spPr>
+          <a:xfrm>
+            <a:off x="9258071" y="4197096"/>
+            <a:ext cx="2202104" cy="310896"/>
+          </a:xfrm>
+          <a:prstGeom prst="rect">
+            <a:avLst/>
+          </a:prstGeom>
+          <a:noFill/>
+          <a:ln/>
+        </p:spPr>
+        <p:txBody>
+          <a:bodyPr wrap="square" lIns="0" tIns="0" rIns="0" bIns="0" rtlCol="0" anchor="ctr"/>
+          <a:lstStyle/>
+          <a:p>
+            <a:pPr indent="0" marL="0">
+              <a:buNone/>
+            </a:pPr>
+            <a:r>
+              <a:rPr lang="en-US" sz="1300" b="1" dirty="0">
+                <a:solidFill>
+                  <a:schemeClr val="accent1"/>
+                </a:solidFill>
+              </a:rPr>
+              <a:t>AXIOM Lab 2.10</a:t>
+            </a:r>
+            <a:endParaRPr lang="en-US" sz="1300" dirty="0"/>
+          </a:p>
+        </p:txBody>
+      </p:sp>
+      <p:sp>
+        <p:nvSpPr>
+          <p:cNvPr id="35" name="Card head"/>
+          <p:cNvSpPr txBox="1"/>
+          <p:nvPr/>
+        </p:nvSpPr>
+        <p:spPr>
+          <a:xfrm>
+            <a:off x="9258071" y="4526280"/>
+            <a:ext cx="2202104" cy="1060704"/>
+          </a:xfrm>
+          <a:prstGeom prst="rect">
+            <a:avLst/>
+          </a:prstGeom>
+          <a:noFill/>
+          <a:ln/>
+        </p:spPr>
+        <p:txBody>
+          <a:bodyPr wrap="square" lIns="0" tIns="0" rIns="0" bIns="0" rtlCol="0" anchor="t"/>
+          <a:lstStyle/>
+          <a:p>
+            <a:pPr indent="0" marL="0">
+              <a:buNone/>
+            </a:pPr>
+            <a:r>
+              <a:rPr lang="en-US" sz="1500" b="1" dirty="0">
+                <a:solidFill>
+                  <a:schemeClr val="tx1"/>
+                </a:solidFill>
+                <a:latin typeface="Cambria" pitchFamily="34" charset="0"/>
+                <a:ea typeface="Cambria" pitchFamily="34" charset="-122"/>
+                <a:cs typeface="Cambria" pitchFamily="34" charset="-120"/>
+              </a:rPr>
+              <a:t>Guarantees Without Odds: Sets, Grades, and Rules</a:t>
+            </a:r>
+            <a:endParaRPr lang="en-US" sz="1500" dirty="0"/>
+          </a:p>
+        </p:txBody>
+      </p:sp>
+      <p:sp>
+        <p:nvSpPr>
+          <p:cNvPr id="36" name="Card text"/>
+          <p:cNvSpPr txBox="1"/>
+          <p:nvPr/>
+        </p:nvSpPr>
+        <p:spPr>
+          <a:xfrm>
+            <a:off x="9258071" y="5660136"/>
             <a:ext cx="2202104" cy="384048"/>
           </a:xfrm>
           <a:prstGeom prst="rect">
